--- a/Mapped Curriculum Lessons/Grade 7/Lesson 12 - Strings and Text/Strings and Text - Slides.pptx
+++ b/Mapped Curriculum Lessons/Grade 7/Lesson 12 - Strings and Text/Strings and Text - Slides.pptx
@@ -2,28 +2,28 @@
 <file path=ppt/presentation.xml><?xml version="1.0" encoding="utf-8"?>
 <p:presentation xmlns:p="http://schemas.openxmlformats.org/presentationml/2006/main" embedTrueTypeFonts="1" saveSubsetFonts="0">
   <p:sldMasterIdLst>
-    <p:sldMasterId xmlns:r="http://schemas.openxmlformats.org/officeDocument/2006/relationships" id="2147483648" r:id="R8efd7f7d632444c4"/>
+    <p:sldMasterId xmlns:r="http://schemas.openxmlformats.org/officeDocument/2006/relationships" id="2147483648" r:id="Rcfbc484d2d104fcb"/>
   </p:sldMasterIdLst>
   <p:notesMasterIdLst>
-    <p:notesMasterId xmlns:r="http://schemas.openxmlformats.org/officeDocument/2006/relationships" r:id="R4aadf9fb29354bd6"/>
+    <p:notesMasterId xmlns:r="http://schemas.openxmlformats.org/officeDocument/2006/relationships" r:id="Rda6c92c199934cd3"/>
   </p:notesMasterIdLst>
   <p:sldIdLst>
-    <p:sldId xmlns:r="http://schemas.openxmlformats.org/officeDocument/2006/relationships" id="256" r:id="R88f79c70d2fd45a9"/>
-    <p:sldId xmlns:r="http://schemas.openxmlformats.org/officeDocument/2006/relationships" id="257" r:id="R49b8cc70d5834310"/>
-    <p:sldId xmlns:r="http://schemas.openxmlformats.org/officeDocument/2006/relationships" id="258" r:id="R762f01f087ef4f6c"/>
-    <p:sldId xmlns:r="http://schemas.openxmlformats.org/officeDocument/2006/relationships" id="259" r:id="R7effd47007224e53"/>
-    <p:sldId xmlns:r="http://schemas.openxmlformats.org/officeDocument/2006/relationships" id="260" r:id="Rc3b5daeaa81f4d54"/>
-    <p:sldId xmlns:r="http://schemas.openxmlformats.org/officeDocument/2006/relationships" id="261" r:id="R66a6f5c7fa774ee3"/>
-    <p:sldId xmlns:r="http://schemas.openxmlformats.org/officeDocument/2006/relationships" id="262" r:id="R2e35f07b39fe4fa7"/>
-    <p:sldId xmlns:r="http://schemas.openxmlformats.org/officeDocument/2006/relationships" id="263" r:id="R0ac0364e35ee424c"/>
-    <p:sldId xmlns:r="http://schemas.openxmlformats.org/officeDocument/2006/relationships" id="264" r:id="Rb9454c4f17a74a65"/>
+    <p:sldId xmlns:r="http://schemas.openxmlformats.org/officeDocument/2006/relationships" id="256" r:id="Rd01130de21d54ec6"/>
+    <p:sldId xmlns:r="http://schemas.openxmlformats.org/officeDocument/2006/relationships" id="257" r:id="R4e02d21bb594454c"/>
+    <p:sldId xmlns:r="http://schemas.openxmlformats.org/officeDocument/2006/relationships" id="258" r:id="R85a61507b2734807"/>
+    <p:sldId xmlns:r="http://schemas.openxmlformats.org/officeDocument/2006/relationships" id="259" r:id="R628d5e199ae04a49"/>
+    <p:sldId xmlns:r="http://schemas.openxmlformats.org/officeDocument/2006/relationships" id="260" r:id="Ree00007a23d4413e"/>
+    <p:sldId xmlns:r="http://schemas.openxmlformats.org/officeDocument/2006/relationships" id="261" r:id="Ra8ca51833e554ef4"/>
+    <p:sldId xmlns:r="http://schemas.openxmlformats.org/officeDocument/2006/relationships" id="262" r:id="Rc481ff1346634fa9"/>
+    <p:sldId xmlns:r="http://schemas.openxmlformats.org/officeDocument/2006/relationships" id="263" r:id="R167f290cda514efd"/>
+    <p:sldId xmlns:r="http://schemas.openxmlformats.org/officeDocument/2006/relationships" id="264" r:id="Re4fb38d9ee9a4626"/>
   </p:sldIdLst>
   <p:sldSz cx="12192000" cy="6858000"/>
   <p:notesSz cx="6858000" cy="9144000"/>
   <p:embeddedFontLst>
     <p:embeddedFont>
       <p:font typeface="JetBrains Mono"/>
-      <p:regular xmlns:r="http://schemas.openxmlformats.org/officeDocument/2006/relationships" r:id="R710f19c11aaf46d9"/>
+      <p:regular xmlns:r="http://schemas.openxmlformats.org/officeDocument/2006/relationships" r:id="R0f9778eb56ae4d15"/>
     </p:embeddedFont>
   </p:embeddedFontLst>
 </p:presentation>
@@ -1071,7 +1071,7 @@
           <p:nvPr/>
         </p:nvPicPr>
         <p:blipFill rotWithShape="1">
-          <a:blip xmlns:r="http://schemas.openxmlformats.org/officeDocument/2006/relationships" xmlns:a="http://schemas.openxmlformats.org/drawingml/2006/main" r:embed="R0e64ba1e5d4b4bd5"/>
+          <a:blip xmlns:r="http://schemas.openxmlformats.org/officeDocument/2006/relationships" xmlns:a="http://schemas.openxmlformats.org/drawingml/2006/main" r:embed="R523a376e6dcf429c"/>
           <a:stretch xmlns:a="http://schemas.openxmlformats.org/drawingml/2006/main"/>
         </p:blipFill>
         <p:spPr>
@@ -1451,7 +1451,7 @@
           <p:nvPr/>
         </p:nvPicPr>
         <p:blipFill rotWithShape="1">
-          <a:blip xmlns:r="http://schemas.openxmlformats.org/officeDocument/2006/relationships" xmlns:a="http://schemas.openxmlformats.org/drawingml/2006/main" r:embed="R6793d74e312e453f">
+          <a:blip xmlns:r="http://schemas.openxmlformats.org/officeDocument/2006/relationships" xmlns:a="http://schemas.openxmlformats.org/drawingml/2006/main" r:embed="R39db07bff6b14b64">
             <a:alphaModFix amt="28000"/>
           </a:blip>
           <a:stretch xmlns:a="http://schemas.openxmlformats.org/drawingml/2006/main"/>
@@ -1664,7 +1664,7 @@
           <p:nvPr/>
         </p:nvPicPr>
         <p:blipFill rotWithShape="1">
-          <a:blip xmlns:r="http://schemas.openxmlformats.org/officeDocument/2006/relationships" xmlns:a="http://schemas.openxmlformats.org/drawingml/2006/main" r:embed="R713fc744c9964e45">
+          <a:blip xmlns:r="http://schemas.openxmlformats.org/officeDocument/2006/relationships" xmlns:a="http://schemas.openxmlformats.org/drawingml/2006/main" r:embed="R37e2e2326eeb4a9a">
             <a:alphaModFix amt="28000"/>
           </a:blip>
           <a:stretch xmlns:a="http://schemas.openxmlformats.org/drawingml/2006/main"/>
@@ -1899,7 +1899,7 @@
           <p:nvPr/>
         </p:nvPicPr>
         <p:blipFill rotWithShape="1">
-          <a:blip xmlns:r="http://schemas.openxmlformats.org/officeDocument/2006/relationships" xmlns:a="http://schemas.openxmlformats.org/drawingml/2006/main" r:embed="Rf39cca4b49bc4528">
+          <a:blip xmlns:r="http://schemas.openxmlformats.org/officeDocument/2006/relationships" xmlns:a="http://schemas.openxmlformats.org/drawingml/2006/main" r:embed="Rbf9f51ff781b4a52">
             <a:alphaModFix amt="28000"/>
           </a:blip>
           <a:stretch xmlns:a="http://schemas.openxmlformats.org/drawingml/2006/main"/>
@@ -2176,7 +2176,7 @@
           <p:nvPr/>
         </p:nvPicPr>
         <p:blipFill rotWithShape="1">
-          <a:blip xmlns:r="http://schemas.openxmlformats.org/officeDocument/2006/relationships" xmlns:a="http://schemas.openxmlformats.org/drawingml/2006/main" r:embed="Rea5ed68b09324617">
+          <a:blip xmlns:r="http://schemas.openxmlformats.org/officeDocument/2006/relationships" xmlns:a="http://schemas.openxmlformats.org/drawingml/2006/main" r:embed="R840714526aba4c58">
             <a:alphaModFix amt="28000"/>
           </a:blip>
           <a:stretch xmlns:a="http://schemas.openxmlformats.org/drawingml/2006/main"/>
@@ -2451,7 +2451,7 @@
           <p:nvPr/>
         </p:nvPicPr>
         <p:blipFill rotWithShape="1">
-          <a:blip xmlns:r="http://schemas.openxmlformats.org/officeDocument/2006/relationships" xmlns:a="http://schemas.openxmlformats.org/drawingml/2006/main" r:embed="Ree79023a6253431f">
+          <a:blip xmlns:r="http://schemas.openxmlformats.org/officeDocument/2006/relationships" xmlns:a="http://schemas.openxmlformats.org/drawingml/2006/main" r:embed="Rd2706258aea446db">
             <a:alphaModFix amt="28000"/>
           </a:blip>
           <a:stretch xmlns:a="http://schemas.openxmlformats.org/drawingml/2006/main"/>
@@ -2875,7 +2875,7 @@
           <p:nvPr/>
         </p:nvPicPr>
         <p:blipFill rotWithShape="1">
-          <a:blip xmlns:r="http://schemas.openxmlformats.org/officeDocument/2006/relationships" xmlns:a="http://schemas.openxmlformats.org/drawingml/2006/main" r:embed="R54d9bf69cbf245f7">
+          <a:blip xmlns:r="http://schemas.openxmlformats.org/officeDocument/2006/relationships" xmlns:a="http://schemas.openxmlformats.org/drawingml/2006/main" r:embed="R122001c610a14f11">
             <a:alphaModFix amt="28000"/>
           </a:blip>
           <a:stretch xmlns:a="http://schemas.openxmlformats.org/drawingml/2006/main"/>
@@ -3016,7 +3016,7 @@
           <p:nvPr/>
         </p:nvPicPr>
         <p:blipFill rotWithShape="1">
-          <a:blip xmlns:r="http://schemas.openxmlformats.org/officeDocument/2006/relationships" xmlns:a="http://schemas.openxmlformats.org/drawingml/2006/main" r:embed="R91005d53ac6045cf">
+          <a:blip xmlns:r="http://schemas.openxmlformats.org/officeDocument/2006/relationships" xmlns:a="http://schemas.openxmlformats.org/drawingml/2006/main" r:embed="Rae965c36d0734c69">
             <a:alphaModFix amt="28000"/>
           </a:blip>
           <a:stretch xmlns:a="http://schemas.openxmlformats.org/drawingml/2006/main"/>
@@ -3130,7 +3130,7 @@
           <p:nvPr/>
         </p:nvPicPr>
         <p:blipFill rotWithShape="1">
-          <a:blip xmlns:r="http://schemas.openxmlformats.org/officeDocument/2006/relationships" xmlns:a="http://schemas.openxmlformats.org/drawingml/2006/main" r:embed="Rf61a4c4164a9403d">
+          <a:blip xmlns:r="http://schemas.openxmlformats.org/officeDocument/2006/relationships" xmlns:a="http://schemas.openxmlformats.org/drawingml/2006/main" r:embed="R24b71986f8454d01">
             <a:alphaModFix amt="28000"/>
           </a:blip>
           <a:stretch xmlns:a="http://schemas.openxmlformats.org/drawingml/2006/main"/>
@@ -3457,7 +3457,7 @@
           <p:nvPr/>
         </p:nvPicPr>
         <p:blipFill rotWithShape="1">
-          <a:blip xmlns:r="http://schemas.openxmlformats.org/officeDocument/2006/relationships" xmlns:a="http://schemas.openxmlformats.org/drawingml/2006/main" r:embed="R877b7ec91bbc4633">
+          <a:blip xmlns:r="http://schemas.openxmlformats.org/officeDocument/2006/relationships" xmlns:a="http://schemas.openxmlformats.org/drawingml/2006/main" r:embed="R77465ad04d464911">
             <a:alphaModFix amt="28000"/>
           </a:blip>
           <a:stretch xmlns:a="http://schemas.openxmlformats.org/drawingml/2006/main"/>
@@ -3745,7 +3745,7 @@
           <p:nvPr/>
         </p:nvPicPr>
         <p:blipFill rotWithShape="1">
-          <a:blip xmlns:r="http://schemas.openxmlformats.org/officeDocument/2006/relationships" xmlns:a="http://schemas.openxmlformats.org/drawingml/2006/main" r:embed="R976b30b3e13f4953">
+          <a:blip xmlns:r="http://schemas.openxmlformats.org/officeDocument/2006/relationships" xmlns:a="http://schemas.openxmlformats.org/drawingml/2006/main" r:embed="R5b21737c2b754812">
             <a:alphaModFix amt="28000"/>
           </a:blip>
           <a:stretch xmlns:a="http://schemas.openxmlformats.org/drawingml/2006/main"/>
@@ -3982,17 +3982,17 @@
   </p:cSld>
   <p:clrMap bg1="lt1" tx1="dk1" bg2="lt2" tx2="dk2" accent1="accent1" accent2="accent2" accent3="accent3" accent4="accent4" accent5="accent5" accent6="accent6" hlink="hlink" folHlink="folHlink"/>
   <p:sldLayoutIdLst>
-    <p:sldLayoutId xmlns:r="http://schemas.openxmlformats.org/officeDocument/2006/relationships" id="2147483649" r:id="R711efdf18bed4174"/>
-    <p:sldLayoutId xmlns:r="http://schemas.openxmlformats.org/officeDocument/2006/relationships" id="2147483650" r:id="Re5fea5d04bc14b8f"/>
-    <p:sldLayoutId xmlns:r="http://schemas.openxmlformats.org/officeDocument/2006/relationships" id="2147483651" r:id="Re923d2b850914e15"/>
-    <p:sldLayoutId xmlns:r="http://schemas.openxmlformats.org/officeDocument/2006/relationships" id="2147483652" r:id="R36afbe7bfc894345"/>
-    <p:sldLayoutId xmlns:r="http://schemas.openxmlformats.org/officeDocument/2006/relationships" id="2147483653" r:id="Rd31f56f9c3e74d44"/>
-    <p:sldLayoutId xmlns:r="http://schemas.openxmlformats.org/officeDocument/2006/relationships" id="2147483654" r:id="R8934a97bb22f4fbf"/>
-    <p:sldLayoutId xmlns:r="http://schemas.openxmlformats.org/officeDocument/2006/relationships" id="2147483655" r:id="Re789ef00d6b9440d"/>
-    <p:sldLayoutId xmlns:r="http://schemas.openxmlformats.org/officeDocument/2006/relationships" id="2147483656" r:id="Re67dd6c09b244612"/>
-    <p:sldLayoutId xmlns:r="http://schemas.openxmlformats.org/officeDocument/2006/relationships" id="2147483657" r:id="Rac075574964d4827"/>
-    <p:sldLayoutId xmlns:r="http://schemas.openxmlformats.org/officeDocument/2006/relationships" id="2147483658" r:id="R45dc769294ac4e44"/>
-    <p:sldLayoutId xmlns:r="http://schemas.openxmlformats.org/officeDocument/2006/relationships" id="2147483659" r:id="Re79bcdfee9904b25"/>
+    <p:sldLayoutId xmlns:r="http://schemas.openxmlformats.org/officeDocument/2006/relationships" id="2147483649" r:id="Rba3e01c1622945e7"/>
+    <p:sldLayoutId xmlns:r="http://schemas.openxmlformats.org/officeDocument/2006/relationships" id="2147483650" r:id="Rdc0880e18f154086"/>
+    <p:sldLayoutId xmlns:r="http://schemas.openxmlformats.org/officeDocument/2006/relationships" id="2147483651" r:id="R075a2ec64e4e4ac4"/>
+    <p:sldLayoutId xmlns:r="http://schemas.openxmlformats.org/officeDocument/2006/relationships" id="2147483652" r:id="Reacf4c2ef2894e8c"/>
+    <p:sldLayoutId xmlns:r="http://schemas.openxmlformats.org/officeDocument/2006/relationships" id="2147483653" r:id="R716a4febaaea4692"/>
+    <p:sldLayoutId xmlns:r="http://schemas.openxmlformats.org/officeDocument/2006/relationships" id="2147483654" r:id="R0a70fe2a40774fd0"/>
+    <p:sldLayoutId xmlns:r="http://schemas.openxmlformats.org/officeDocument/2006/relationships" id="2147483655" r:id="R356be7f54c144180"/>
+    <p:sldLayoutId xmlns:r="http://schemas.openxmlformats.org/officeDocument/2006/relationships" id="2147483656" r:id="R9e3cb3aeaf8a4eb9"/>
+    <p:sldLayoutId xmlns:r="http://schemas.openxmlformats.org/officeDocument/2006/relationships" id="2147483657" r:id="Rd68614c1fd1a49bf"/>
+    <p:sldLayoutId xmlns:r="http://schemas.openxmlformats.org/officeDocument/2006/relationships" id="2147483658" r:id="R8947f23a853d4e9a"/>
+    <p:sldLayoutId xmlns:r="http://schemas.openxmlformats.org/officeDocument/2006/relationships" id="2147483659" r:id="R659e12bdc0ff46fe"/>
   </p:sldLayoutIdLst>
   <p:hf hdr="0" ftr="0" dt="0"/>
   <p:txStyles>

--- a/Mapped Curriculum Lessons/Grade 7/Lesson 12 - Strings and Text/Strings and Text - Slides.pptx
+++ b/Mapped Curriculum Lessons/Grade 7/Lesson 12 - Strings and Text/Strings and Text - Slides.pptx
@@ -2,28 +2,28 @@
 <file path=ppt/presentation.xml><?xml version="1.0" encoding="utf-8"?>
 <p:presentation xmlns:p="http://schemas.openxmlformats.org/presentationml/2006/main" embedTrueTypeFonts="1" saveSubsetFonts="0">
   <p:sldMasterIdLst>
-    <p:sldMasterId xmlns:r="http://schemas.openxmlformats.org/officeDocument/2006/relationships" id="2147483648" r:id="Rcfbc484d2d104fcb"/>
+    <p:sldMasterId xmlns:r="http://schemas.openxmlformats.org/officeDocument/2006/relationships" id="2147483648" r:id="R68358573f5744f89"/>
   </p:sldMasterIdLst>
   <p:notesMasterIdLst>
-    <p:notesMasterId xmlns:r="http://schemas.openxmlformats.org/officeDocument/2006/relationships" r:id="Rda6c92c199934cd3"/>
+    <p:notesMasterId xmlns:r="http://schemas.openxmlformats.org/officeDocument/2006/relationships" r:id="Rb56fd04f1f14491b"/>
   </p:notesMasterIdLst>
   <p:sldIdLst>
-    <p:sldId xmlns:r="http://schemas.openxmlformats.org/officeDocument/2006/relationships" id="256" r:id="Rd01130de21d54ec6"/>
-    <p:sldId xmlns:r="http://schemas.openxmlformats.org/officeDocument/2006/relationships" id="257" r:id="R4e02d21bb594454c"/>
-    <p:sldId xmlns:r="http://schemas.openxmlformats.org/officeDocument/2006/relationships" id="258" r:id="R85a61507b2734807"/>
-    <p:sldId xmlns:r="http://schemas.openxmlformats.org/officeDocument/2006/relationships" id="259" r:id="R628d5e199ae04a49"/>
-    <p:sldId xmlns:r="http://schemas.openxmlformats.org/officeDocument/2006/relationships" id="260" r:id="Ree00007a23d4413e"/>
-    <p:sldId xmlns:r="http://schemas.openxmlformats.org/officeDocument/2006/relationships" id="261" r:id="Ra8ca51833e554ef4"/>
-    <p:sldId xmlns:r="http://schemas.openxmlformats.org/officeDocument/2006/relationships" id="262" r:id="Rc481ff1346634fa9"/>
-    <p:sldId xmlns:r="http://schemas.openxmlformats.org/officeDocument/2006/relationships" id="263" r:id="R167f290cda514efd"/>
-    <p:sldId xmlns:r="http://schemas.openxmlformats.org/officeDocument/2006/relationships" id="264" r:id="Re4fb38d9ee9a4626"/>
+    <p:sldId xmlns:r="http://schemas.openxmlformats.org/officeDocument/2006/relationships" id="256" r:id="R1b5bbc6f9e974ca8"/>
+    <p:sldId xmlns:r="http://schemas.openxmlformats.org/officeDocument/2006/relationships" id="257" r:id="R8447c2d261b84f96"/>
+    <p:sldId xmlns:r="http://schemas.openxmlformats.org/officeDocument/2006/relationships" id="258" r:id="Rbaaf08d1904748af"/>
+    <p:sldId xmlns:r="http://schemas.openxmlformats.org/officeDocument/2006/relationships" id="259" r:id="R2d6ae406df6f4afc"/>
+    <p:sldId xmlns:r="http://schemas.openxmlformats.org/officeDocument/2006/relationships" id="260" r:id="R99250e42beea459c"/>
+    <p:sldId xmlns:r="http://schemas.openxmlformats.org/officeDocument/2006/relationships" id="261" r:id="R1358bb7213cf44a0"/>
+    <p:sldId xmlns:r="http://schemas.openxmlformats.org/officeDocument/2006/relationships" id="262" r:id="R3bf8e198175c4ad8"/>
+    <p:sldId xmlns:r="http://schemas.openxmlformats.org/officeDocument/2006/relationships" id="263" r:id="Rfb6bcc9e33014cf0"/>
+    <p:sldId xmlns:r="http://schemas.openxmlformats.org/officeDocument/2006/relationships" id="264" r:id="R87260f0825064206"/>
   </p:sldIdLst>
   <p:sldSz cx="12192000" cy="6858000"/>
   <p:notesSz cx="6858000" cy="9144000"/>
   <p:embeddedFontLst>
     <p:embeddedFont>
       <p:font typeface="JetBrains Mono"/>
-      <p:regular xmlns:r="http://schemas.openxmlformats.org/officeDocument/2006/relationships" r:id="R0f9778eb56ae4d15"/>
+      <p:regular xmlns:r="http://schemas.openxmlformats.org/officeDocument/2006/relationships" r:id="Rf964a765221248a1"/>
     </p:embeddedFont>
   </p:embeddedFontLst>
 </p:presentation>
@@ -1071,7 +1071,7 @@
           <p:nvPr/>
         </p:nvPicPr>
         <p:blipFill rotWithShape="1">
-          <a:blip xmlns:r="http://schemas.openxmlformats.org/officeDocument/2006/relationships" xmlns:a="http://schemas.openxmlformats.org/drawingml/2006/main" r:embed="R523a376e6dcf429c"/>
+          <a:blip xmlns:r="http://schemas.openxmlformats.org/officeDocument/2006/relationships" xmlns:a="http://schemas.openxmlformats.org/drawingml/2006/main" r:embed="R26b5031e4b014257"/>
           <a:stretch xmlns:a="http://schemas.openxmlformats.org/drawingml/2006/main"/>
         </p:blipFill>
         <p:spPr>
@@ -1451,7 +1451,7 @@
           <p:nvPr/>
         </p:nvPicPr>
         <p:blipFill rotWithShape="1">
-          <a:blip xmlns:r="http://schemas.openxmlformats.org/officeDocument/2006/relationships" xmlns:a="http://schemas.openxmlformats.org/drawingml/2006/main" r:embed="R39db07bff6b14b64">
+          <a:blip xmlns:r="http://schemas.openxmlformats.org/officeDocument/2006/relationships" xmlns:a="http://schemas.openxmlformats.org/drawingml/2006/main" r:embed="R7f14e0fcd8514628">
             <a:alphaModFix amt="28000"/>
           </a:blip>
           <a:stretch xmlns:a="http://schemas.openxmlformats.org/drawingml/2006/main"/>
@@ -1664,7 +1664,7 @@
           <p:nvPr/>
         </p:nvPicPr>
         <p:blipFill rotWithShape="1">
-          <a:blip xmlns:r="http://schemas.openxmlformats.org/officeDocument/2006/relationships" xmlns:a="http://schemas.openxmlformats.org/drawingml/2006/main" r:embed="R37e2e2326eeb4a9a">
+          <a:blip xmlns:r="http://schemas.openxmlformats.org/officeDocument/2006/relationships" xmlns:a="http://schemas.openxmlformats.org/drawingml/2006/main" r:embed="Ra600fe807eb0412d">
             <a:alphaModFix amt="28000"/>
           </a:blip>
           <a:stretch xmlns:a="http://schemas.openxmlformats.org/drawingml/2006/main"/>
@@ -1899,7 +1899,7 @@
           <p:nvPr/>
         </p:nvPicPr>
         <p:blipFill rotWithShape="1">
-          <a:blip xmlns:r="http://schemas.openxmlformats.org/officeDocument/2006/relationships" xmlns:a="http://schemas.openxmlformats.org/drawingml/2006/main" r:embed="Rbf9f51ff781b4a52">
+          <a:blip xmlns:r="http://schemas.openxmlformats.org/officeDocument/2006/relationships" xmlns:a="http://schemas.openxmlformats.org/drawingml/2006/main" r:embed="R15f37684ecc14722">
             <a:alphaModFix amt="28000"/>
           </a:blip>
           <a:stretch xmlns:a="http://schemas.openxmlformats.org/drawingml/2006/main"/>
@@ -2176,7 +2176,7 @@
           <p:nvPr/>
         </p:nvPicPr>
         <p:blipFill rotWithShape="1">
-          <a:blip xmlns:r="http://schemas.openxmlformats.org/officeDocument/2006/relationships" xmlns:a="http://schemas.openxmlformats.org/drawingml/2006/main" r:embed="R840714526aba4c58">
+          <a:blip xmlns:r="http://schemas.openxmlformats.org/officeDocument/2006/relationships" xmlns:a="http://schemas.openxmlformats.org/drawingml/2006/main" r:embed="R70ba2f5fe4d643d9">
             <a:alphaModFix amt="28000"/>
           </a:blip>
           <a:stretch xmlns:a="http://schemas.openxmlformats.org/drawingml/2006/main"/>
@@ -2451,7 +2451,7 @@
           <p:nvPr/>
         </p:nvPicPr>
         <p:blipFill rotWithShape="1">
-          <a:blip xmlns:r="http://schemas.openxmlformats.org/officeDocument/2006/relationships" xmlns:a="http://schemas.openxmlformats.org/drawingml/2006/main" r:embed="Rd2706258aea446db">
+          <a:blip xmlns:r="http://schemas.openxmlformats.org/officeDocument/2006/relationships" xmlns:a="http://schemas.openxmlformats.org/drawingml/2006/main" r:embed="R231672bc682a4b49">
             <a:alphaModFix amt="28000"/>
           </a:blip>
           <a:stretch xmlns:a="http://schemas.openxmlformats.org/drawingml/2006/main"/>
@@ -2875,7 +2875,7 @@
           <p:nvPr/>
         </p:nvPicPr>
         <p:blipFill rotWithShape="1">
-          <a:blip xmlns:r="http://schemas.openxmlformats.org/officeDocument/2006/relationships" xmlns:a="http://schemas.openxmlformats.org/drawingml/2006/main" r:embed="R122001c610a14f11">
+          <a:blip xmlns:r="http://schemas.openxmlformats.org/officeDocument/2006/relationships" xmlns:a="http://schemas.openxmlformats.org/drawingml/2006/main" r:embed="Rbd8c5b3d15f74a43">
             <a:alphaModFix amt="28000"/>
           </a:blip>
           <a:stretch xmlns:a="http://schemas.openxmlformats.org/drawingml/2006/main"/>
@@ -3016,7 +3016,7 @@
           <p:nvPr/>
         </p:nvPicPr>
         <p:blipFill rotWithShape="1">
-          <a:blip xmlns:r="http://schemas.openxmlformats.org/officeDocument/2006/relationships" xmlns:a="http://schemas.openxmlformats.org/drawingml/2006/main" r:embed="Rae965c36d0734c69">
+          <a:blip xmlns:r="http://schemas.openxmlformats.org/officeDocument/2006/relationships" xmlns:a="http://schemas.openxmlformats.org/drawingml/2006/main" r:embed="R86fe45993cec451c">
             <a:alphaModFix amt="28000"/>
           </a:blip>
           <a:stretch xmlns:a="http://schemas.openxmlformats.org/drawingml/2006/main"/>
@@ -3130,7 +3130,7 @@
           <p:nvPr/>
         </p:nvPicPr>
         <p:blipFill rotWithShape="1">
-          <a:blip xmlns:r="http://schemas.openxmlformats.org/officeDocument/2006/relationships" xmlns:a="http://schemas.openxmlformats.org/drawingml/2006/main" r:embed="R24b71986f8454d01">
+          <a:blip xmlns:r="http://schemas.openxmlformats.org/officeDocument/2006/relationships" xmlns:a="http://schemas.openxmlformats.org/drawingml/2006/main" r:embed="R8fd7ee8431dc4091">
             <a:alphaModFix amt="28000"/>
           </a:blip>
           <a:stretch xmlns:a="http://schemas.openxmlformats.org/drawingml/2006/main"/>
@@ -3457,7 +3457,7 @@
           <p:nvPr/>
         </p:nvPicPr>
         <p:blipFill rotWithShape="1">
-          <a:blip xmlns:r="http://schemas.openxmlformats.org/officeDocument/2006/relationships" xmlns:a="http://schemas.openxmlformats.org/drawingml/2006/main" r:embed="R77465ad04d464911">
+          <a:blip xmlns:r="http://schemas.openxmlformats.org/officeDocument/2006/relationships" xmlns:a="http://schemas.openxmlformats.org/drawingml/2006/main" r:embed="Rc27fb0f7fe1446e7">
             <a:alphaModFix amt="28000"/>
           </a:blip>
           <a:stretch xmlns:a="http://schemas.openxmlformats.org/drawingml/2006/main"/>
@@ -3745,7 +3745,7 @@
           <p:nvPr/>
         </p:nvPicPr>
         <p:blipFill rotWithShape="1">
-          <a:blip xmlns:r="http://schemas.openxmlformats.org/officeDocument/2006/relationships" xmlns:a="http://schemas.openxmlformats.org/drawingml/2006/main" r:embed="R5b21737c2b754812">
+          <a:blip xmlns:r="http://schemas.openxmlformats.org/officeDocument/2006/relationships" xmlns:a="http://schemas.openxmlformats.org/drawingml/2006/main" r:embed="Rc37db307036049d7">
             <a:alphaModFix amt="28000"/>
           </a:blip>
           <a:stretch xmlns:a="http://schemas.openxmlformats.org/drawingml/2006/main"/>
@@ -3982,17 +3982,17 @@
   </p:cSld>
   <p:clrMap bg1="lt1" tx1="dk1" bg2="lt2" tx2="dk2" accent1="accent1" accent2="accent2" accent3="accent3" accent4="accent4" accent5="accent5" accent6="accent6" hlink="hlink" folHlink="folHlink"/>
   <p:sldLayoutIdLst>
-    <p:sldLayoutId xmlns:r="http://schemas.openxmlformats.org/officeDocument/2006/relationships" id="2147483649" r:id="Rba3e01c1622945e7"/>
-    <p:sldLayoutId xmlns:r="http://schemas.openxmlformats.org/officeDocument/2006/relationships" id="2147483650" r:id="Rdc0880e18f154086"/>
-    <p:sldLayoutId xmlns:r="http://schemas.openxmlformats.org/officeDocument/2006/relationships" id="2147483651" r:id="R075a2ec64e4e4ac4"/>
-    <p:sldLayoutId xmlns:r="http://schemas.openxmlformats.org/officeDocument/2006/relationships" id="2147483652" r:id="Reacf4c2ef2894e8c"/>
-    <p:sldLayoutId xmlns:r="http://schemas.openxmlformats.org/officeDocument/2006/relationships" id="2147483653" r:id="R716a4febaaea4692"/>
-    <p:sldLayoutId xmlns:r="http://schemas.openxmlformats.org/officeDocument/2006/relationships" id="2147483654" r:id="R0a70fe2a40774fd0"/>
-    <p:sldLayoutId xmlns:r="http://schemas.openxmlformats.org/officeDocument/2006/relationships" id="2147483655" r:id="R356be7f54c144180"/>
-    <p:sldLayoutId xmlns:r="http://schemas.openxmlformats.org/officeDocument/2006/relationships" id="2147483656" r:id="R9e3cb3aeaf8a4eb9"/>
-    <p:sldLayoutId xmlns:r="http://schemas.openxmlformats.org/officeDocument/2006/relationships" id="2147483657" r:id="Rd68614c1fd1a49bf"/>
-    <p:sldLayoutId xmlns:r="http://schemas.openxmlformats.org/officeDocument/2006/relationships" id="2147483658" r:id="R8947f23a853d4e9a"/>
-    <p:sldLayoutId xmlns:r="http://schemas.openxmlformats.org/officeDocument/2006/relationships" id="2147483659" r:id="R659e12bdc0ff46fe"/>
+    <p:sldLayoutId xmlns:r="http://schemas.openxmlformats.org/officeDocument/2006/relationships" id="2147483649" r:id="R75554ac7d41c450e"/>
+    <p:sldLayoutId xmlns:r="http://schemas.openxmlformats.org/officeDocument/2006/relationships" id="2147483650" r:id="R095e7d5bb3b243b6"/>
+    <p:sldLayoutId xmlns:r="http://schemas.openxmlformats.org/officeDocument/2006/relationships" id="2147483651" r:id="R2a09653687c44976"/>
+    <p:sldLayoutId xmlns:r="http://schemas.openxmlformats.org/officeDocument/2006/relationships" id="2147483652" r:id="Rdd872d16bf9c4162"/>
+    <p:sldLayoutId xmlns:r="http://schemas.openxmlformats.org/officeDocument/2006/relationships" id="2147483653" r:id="Rfaaa0b98d7794608"/>
+    <p:sldLayoutId xmlns:r="http://schemas.openxmlformats.org/officeDocument/2006/relationships" id="2147483654" r:id="R4c4d04c863a648e3"/>
+    <p:sldLayoutId xmlns:r="http://schemas.openxmlformats.org/officeDocument/2006/relationships" id="2147483655" r:id="R6ef3e8f10e27485a"/>
+    <p:sldLayoutId xmlns:r="http://schemas.openxmlformats.org/officeDocument/2006/relationships" id="2147483656" r:id="R3c140c3f053e41fb"/>
+    <p:sldLayoutId xmlns:r="http://schemas.openxmlformats.org/officeDocument/2006/relationships" id="2147483657" r:id="R124da69b298b4991"/>
+    <p:sldLayoutId xmlns:r="http://schemas.openxmlformats.org/officeDocument/2006/relationships" id="2147483658" r:id="R56f7e89642cc4bfa"/>
+    <p:sldLayoutId xmlns:r="http://schemas.openxmlformats.org/officeDocument/2006/relationships" id="2147483659" r:id="R422794da8800423b"/>
   </p:sldLayoutIdLst>
   <p:hf hdr="0" ftr="0" dt="0"/>
   <p:txStyles>
@@ -5082,29 +5082,7 @@
                 <a:ea typeface="JetBrains Mono"/>
                 <a:cs typeface="JetBrains Mono"/>
               </a:rPr>
-              <a:t>, name, </a:t>
-            </a:r>
-            <a:r>
-              <a:rPr sz="2400">
-                <a:solidFill>
-                  <a:srgbClr val="067D17"/>
-                </a:solidFill>
-                <a:latin typeface="JetBrains Mono"/>
-                <a:ea typeface="JetBrains Mono"/>
-                <a:cs typeface="JetBrains Mono"/>
-              </a:rPr>
-              <a:t>"!"</a:t>
-            </a:r>
-            <a:r>
-              <a:rPr sz="2400">
-                <a:solidFill>
-                  <a:srgbClr val="080808"/>
-                </a:solidFill>
-                <a:latin typeface="JetBrains Mono"/>
-                <a:ea typeface="JetBrains Mono"/>
-                <a:cs typeface="JetBrains Mono"/>
-              </a:rPr>
-              <a:t>)</a:t>
+              <a:t>, name)</a:t>
             </a:r>
           </a:p>
         </p:txBody>
@@ -5578,29 +5556,7 @@
                 <a:ea typeface="JetBrains Mono"/>
                 <a:cs typeface="JetBrains Mono"/>
               </a:rPr>
-              <a:t>, name, </a:t>
-            </a:r>
-            <a:r>
-              <a:rPr sz="2400">
-                <a:solidFill>
-                  <a:srgbClr val="067D17"/>
-                </a:solidFill>
-                <a:latin typeface="JetBrains Mono"/>
-                <a:ea typeface="JetBrains Mono"/>
-                <a:cs typeface="JetBrains Mono"/>
-              </a:rPr>
-              <a:t>"!"</a:t>
-            </a:r>
-            <a:r>
-              <a:rPr sz="2400">
-                <a:solidFill>
-                  <a:srgbClr val="080808"/>
-                </a:solidFill>
-                <a:latin typeface="JetBrains Mono"/>
-                <a:ea typeface="JetBrains Mono"/>
-                <a:cs typeface="JetBrains Mono"/>
-              </a:rPr>
-              <a:t>)</a:t>
+              <a:t>, name)</a:t>
             </a:r>
           </a:p>
         </p:txBody>
@@ -6074,29 +6030,7 @@
                 <a:ea typeface="JetBrains Mono"/>
                 <a:cs typeface="JetBrains Mono"/>
               </a:rPr>
-              <a:t>, name, </a:t>
-            </a:r>
-            <a:r>
-              <a:rPr sz="2400">
-                <a:solidFill>
-                  <a:srgbClr val="067D17"/>
-                </a:solidFill>
-                <a:latin typeface="JetBrains Mono"/>
-                <a:ea typeface="JetBrains Mono"/>
-                <a:cs typeface="JetBrains Mono"/>
-              </a:rPr>
-              <a:t>"!"</a:t>
-            </a:r>
-            <a:r>
-              <a:rPr sz="2400">
-                <a:solidFill>
-                  <a:srgbClr val="080808"/>
-                </a:solidFill>
-                <a:latin typeface="JetBrains Mono"/>
-                <a:ea typeface="JetBrains Mono"/>
-                <a:cs typeface="JetBrains Mono"/>
-              </a:rPr>
-              <a:t>)</a:t>
+              <a:t>, name)</a:t>
             </a:r>
           </a:p>
         </p:txBody>
@@ -6815,29 +6749,7 @@
                 <a:ea typeface="JetBrains Mono"/>
                 <a:cs typeface="JetBrains Mono"/>
               </a:rPr>
-              <a:t>, name, </a:t>
-            </a:r>
-            <a:r>
-              <a:rPr sz="1600">
-                <a:solidFill>
-                  <a:srgbClr val="067D17"/>
-                </a:solidFill>
-                <a:latin typeface="JetBrains Mono"/>
-                <a:ea typeface="JetBrains Mono"/>
-                <a:cs typeface="JetBrains Mono"/>
-              </a:rPr>
-              <a:t>"!"</a:t>
-            </a:r>
-            <a:r>
-              <a:rPr sz="1600">
-                <a:solidFill>
-                  <a:srgbClr val="080808"/>
-                </a:solidFill>
-                <a:latin typeface="JetBrains Mono"/>
-                <a:ea typeface="JetBrains Mono"/>
-                <a:cs typeface="JetBrains Mono"/>
-              </a:rPr>
-              <a:t>)</a:t>
+              <a:t>, name)</a:t>
             </a:r>
           </a:p>
         </p:txBody>
@@ -6941,7 +6853,7 @@
                 <a:ea typeface="Calibri"/>
                 <a:cs typeface="Calibri"/>
               </a:rPr>
-              <a:t>Store the cleaned name in a new variable called clean_name. Use </a:t>
+              <a:t>Use </a:t>
             </a:r>
             <a:r>
               <a:rPr sz="2400" b="0">
@@ -6985,7 +6897,7 @@
                 <a:ea typeface="Calibri"/>
                 <a:cs typeface="Calibri"/>
               </a:rPr>
-              <a:t> together, then display clean_name. Input </a:t>
+              <a:t> on [name], then store the result in a new variable called [clean_name]. Display [clean_name]. The input </a:t>
             </a:r>
             <a:r>
               <a:rPr sz="2400" b="0">
@@ -7007,7 +6919,29 @@
                 <a:ea typeface="Calibri"/>
                 <a:cs typeface="Calibri"/>
               </a:rPr>
-              <a:t> must display the cleaned name as Alex.</a:t>
+              <a:t> must display </a:t>
+            </a:r>
+            <a:r>
+              <a:rPr sz="2400" b="0">
+                <a:solidFill>
+                  <a:srgbClr val="067D17"/>
+                </a:solidFill>
+                <a:latin typeface="JetBrains Mono"/>
+                <a:ea typeface="JetBrains Mono"/>
+                <a:cs typeface="JetBrains Mono"/>
+              </a:rPr>
+              <a:t>"Hello, Alex"</a:t>
+            </a:r>
+            <a:r>
+              <a:rPr sz="2400" b="0">
+                <a:solidFill>
+                  <a:srgbClr val="080808"/>
+                </a:solidFill>
+                <a:latin typeface="Calibri"/>
+                <a:ea typeface="Calibri"/>
+                <a:cs typeface="Calibri"/>
+              </a:rPr>
+              <a:t>.</a:t>
             </a:r>
           </a:p>
         </p:txBody>
@@ -7473,29 +7407,7 @@
                 <a:ea typeface="JetBrains Mono"/>
                 <a:cs typeface="JetBrains Mono"/>
               </a:rPr>
-              <a:t>, name, </a:t>
-            </a:r>
-            <a:r>
-              <a:rPr sz="1600">
-                <a:solidFill>
-                  <a:srgbClr val="067D17"/>
-                </a:solidFill>
-                <a:latin typeface="JetBrains Mono"/>
-                <a:ea typeface="JetBrains Mono"/>
-                <a:cs typeface="JetBrains Mono"/>
-              </a:rPr>
-              <a:t>"!"</a:t>
-            </a:r>
-            <a:r>
-              <a:rPr sz="1600">
-                <a:solidFill>
-                  <a:srgbClr val="080808"/>
-                </a:solidFill>
-                <a:latin typeface="JetBrains Mono"/>
-                <a:ea typeface="JetBrains Mono"/>
-                <a:cs typeface="JetBrains Mono"/>
-              </a:rPr>
-              <a:t>)</a:t>
+              <a:t>, name)</a:t>
             </a:r>
           </a:p>
         </p:txBody>
@@ -7599,7 +7511,7 @@
                 <a:ea typeface="Calibri"/>
                 <a:cs typeface="Calibri"/>
               </a:rPr>
-              <a:t>A name badge needs a first name and surname. Extend the program so both answers are cleaned with </a:t>
+              <a:t>Ask for a first name and store it in [name]. Ask for a surname and store it in [surname]. Apply </a:t>
             </a:r>
             <a:r>
               <a:rPr sz="2400" b="0">
@@ -7643,7 +7555,73 @@
                 <a:ea typeface="Calibri"/>
                 <a:cs typeface="Calibri"/>
               </a:rPr>
-              <a:t>, then display the finished full name.</a:t>
+              <a:t> to both variables, then display the full name. Test </a:t>
+            </a:r>
+            <a:r>
+              <a:rPr sz="2400" b="0">
+                <a:solidFill>
+                  <a:srgbClr val="067D17"/>
+                </a:solidFill>
+                <a:latin typeface="JetBrains Mono"/>
+                <a:ea typeface="JetBrains Mono"/>
+                <a:cs typeface="JetBrains Mono"/>
+              </a:rPr>
+              <a:t>"  aLEX  "</a:t>
+            </a:r>
+            <a:r>
+              <a:rPr sz="2400" b="0">
+                <a:solidFill>
+                  <a:srgbClr val="080808"/>
+                </a:solidFill>
+                <a:latin typeface="Calibri"/>
+                <a:ea typeface="Calibri"/>
+                <a:cs typeface="Calibri"/>
+              </a:rPr>
+              <a:t> and </a:t>
+            </a:r>
+            <a:r>
+              <a:rPr sz="2400" b="0">
+                <a:solidFill>
+                  <a:srgbClr val="067D17"/>
+                </a:solidFill>
+                <a:latin typeface="JetBrains Mono"/>
+                <a:ea typeface="JetBrains Mono"/>
+                <a:cs typeface="JetBrains Mono"/>
+              </a:rPr>
+              <a:t>"  nGUYEN  "</a:t>
+            </a:r>
+            <a:r>
+              <a:rPr sz="2400" b="0">
+                <a:solidFill>
+                  <a:srgbClr val="080808"/>
+                </a:solidFill>
+                <a:latin typeface="Calibri"/>
+                <a:ea typeface="Calibri"/>
+                <a:cs typeface="Calibri"/>
+              </a:rPr>
+              <a:t>; display </a:t>
+            </a:r>
+            <a:r>
+              <a:rPr sz="2400" b="0">
+                <a:solidFill>
+                  <a:srgbClr val="067D17"/>
+                </a:solidFill>
+                <a:latin typeface="JetBrains Mono"/>
+                <a:ea typeface="JetBrains Mono"/>
+                <a:cs typeface="JetBrains Mono"/>
+              </a:rPr>
+              <a:t>"Hello, Alex Nguyen"</a:t>
+            </a:r>
+            <a:r>
+              <a:rPr sz="2400" b="0">
+                <a:solidFill>
+                  <a:srgbClr val="080808"/>
+                </a:solidFill>
+                <a:latin typeface="Calibri"/>
+                <a:ea typeface="Calibri"/>
+                <a:cs typeface="Calibri"/>
+              </a:rPr>
+              <a:t>.</a:t>
             </a:r>
           </a:p>
         </p:txBody>
@@ -8109,29 +8087,7 @@
                 <a:ea typeface="JetBrains Mono"/>
                 <a:cs typeface="JetBrains Mono"/>
               </a:rPr>
-              <a:t>, name, </a:t>
-            </a:r>
-            <a:r>
-              <a:rPr sz="1600">
-                <a:solidFill>
-                  <a:srgbClr val="067D17"/>
-                </a:solidFill>
-                <a:latin typeface="JetBrains Mono"/>
-                <a:ea typeface="JetBrains Mono"/>
-                <a:cs typeface="JetBrains Mono"/>
-              </a:rPr>
-              <a:t>"!"</a:t>
-            </a:r>
-            <a:r>
-              <a:rPr sz="1600">
-                <a:solidFill>
-                  <a:srgbClr val="080808"/>
-                </a:solidFill>
-                <a:latin typeface="JetBrains Mono"/>
-                <a:ea typeface="JetBrains Mono"/>
-                <a:cs typeface="JetBrains Mono"/>
-              </a:rPr>
-              <a:t>)</a:t>
+              <a:t>, name)</a:t>
             </a:r>
           </a:p>
         </p:txBody>
@@ -8216,7 +8172,7 @@
         </p:spPr>
         <p:txBody>
           <a:bodyPr xmlns:a="http://schemas.openxmlformats.org/drawingml/2006/main">
-            <a:normAutofit fontScale="100000"/>
+            <a:normAutofit fontScale="82745"/>
           </a:bodyPr>
           <a:lstStyle xmlns:a="http://schemas.openxmlformats.org/drawingml/2006/main"/>
           <a:p xmlns:a="http://schemas.openxmlformats.org/drawingml/2006/main">
@@ -8235,18 +8191,194 @@
                 <a:ea typeface="Calibri"/>
                 <a:cs typeface="Calibri"/>
               </a:rPr>
-              <a:t>Choose a place you would like to visit. Build a destination label from a city and country, cleaning both answers before you display </a:t>
+              <a:t>Ask for a city, country and landmark and store the answers in [city], [country] and [landmark]. Apply </a:t>
             </a:r>
             <a:r>
               <a:rPr sz="2400" b="0">
                 <a:solidFill>
+                  <a:srgbClr val="1750EB"/>
+                </a:solidFill>
+                <a:latin typeface="JetBrains Mono"/>
+                <a:ea typeface="JetBrains Mono"/>
+                <a:cs typeface="JetBrains Mono"/>
+              </a:rPr>
+              <a:t>strip()</a:t>
+            </a:r>
+            <a:r>
+              <a:rPr sz="2400" b="0">
+                <a:solidFill>
+                  <a:srgbClr val="080808"/>
+                </a:solidFill>
+                <a:latin typeface="Calibri"/>
+                <a:ea typeface="Calibri"/>
+                <a:cs typeface="Calibri"/>
+              </a:rPr>
+              <a:t> and </a:t>
+            </a:r>
+            <a:r>
+              <a:rPr sz="2400" b="0">
+                <a:solidFill>
+                  <a:srgbClr val="1750EB"/>
+                </a:solidFill>
+                <a:latin typeface="JetBrains Mono"/>
+                <a:ea typeface="JetBrains Mono"/>
+                <a:cs typeface="JetBrains Mono"/>
+              </a:rPr>
+              <a:t>title()</a:t>
+            </a:r>
+            <a:r>
+              <a:rPr sz="2400" b="0">
+                <a:solidFill>
+                  <a:srgbClr val="080808"/>
+                </a:solidFill>
+                <a:latin typeface="Calibri"/>
+                <a:ea typeface="Calibri"/>
+                <a:cs typeface="Calibri"/>
+              </a:rPr>
+              <a:t> to all three variables. Display the city and country on a line beginning </a:t>
+            </a:r>
+            <a:r>
+              <a:rPr sz="2400" b="0">
+                <a:solidFill>
                   <a:srgbClr val="067D17"/>
                 </a:solidFill>
                 <a:latin typeface="JetBrains Mono"/>
                 <a:ea typeface="JetBrains Mono"/>
                 <a:cs typeface="JetBrains Mono"/>
               </a:rPr>
-              <a:t>"Destination: [city] - [country]"</a:t>
+              <a:t>"Destination:"</a:t>
+            </a:r>
+            <a:r>
+              <a:rPr sz="2400" b="0">
+                <a:solidFill>
+                  <a:srgbClr val="080808"/>
+                </a:solidFill>
+                <a:latin typeface="Calibri"/>
+                <a:ea typeface="Calibri"/>
+                <a:cs typeface="Calibri"/>
+              </a:rPr>
+              <a:t>. Display the landmark on a second line beginning </a:t>
+            </a:r>
+            <a:r>
+              <a:rPr sz="2400" b="0">
+                <a:solidFill>
+                  <a:srgbClr val="067D17"/>
+                </a:solidFill>
+                <a:latin typeface="JetBrains Mono"/>
+                <a:ea typeface="JetBrains Mono"/>
+                <a:cs typeface="JetBrains Mono"/>
+              </a:rPr>
+              <a:t>"Visit:"</a:t>
+            </a:r>
+            <a:r>
+              <a:rPr sz="2400" b="0">
+                <a:solidFill>
+                  <a:srgbClr val="080808"/>
+                </a:solidFill>
+                <a:latin typeface="Calibri"/>
+                <a:ea typeface="Calibri"/>
+                <a:cs typeface="Calibri"/>
+              </a:rPr>
+              <a:t>. Test </a:t>
+            </a:r>
+            <a:r>
+              <a:rPr sz="2400" b="0">
+                <a:solidFill>
+                  <a:srgbClr val="067D17"/>
+                </a:solidFill>
+                <a:latin typeface="JetBrains Mono"/>
+                <a:ea typeface="JetBrains Mono"/>
+                <a:cs typeface="JetBrains Mono"/>
+              </a:rPr>
+              <a:t>"  hANOI  "</a:t>
+            </a:r>
+            <a:r>
+              <a:rPr sz="2400" b="0">
+                <a:solidFill>
+                  <a:srgbClr val="080808"/>
+                </a:solidFill>
+                <a:latin typeface="Calibri"/>
+                <a:ea typeface="Calibri"/>
+                <a:cs typeface="Calibri"/>
+              </a:rPr>
+              <a:t>, </a:t>
+            </a:r>
+            <a:r>
+              <a:rPr sz="2400" b="0">
+                <a:solidFill>
+                  <a:srgbClr val="067D17"/>
+                </a:solidFill>
+                <a:latin typeface="JetBrains Mono"/>
+                <a:ea typeface="JetBrains Mono"/>
+                <a:cs typeface="JetBrains Mono"/>
+              </a:rPr>
+              <a:t>"  vIETNAM  "</a:t>
+            </a:r>
+            <a:r>
+              <a:rPr sz="2400" b="0">
+                <a:solidFill>
+                  <a:srgbClr val="080808"/>
+                </a:solidFill>
+                <a:latin typeface="Calibri"/>
+                <a:ea typeface="Calibri"/>
+                <a:cs typeface="Calibri"/>
+              </a:rPr>
+              <a:t> and </a:t>
+            </a:r>
+            <a:r>
+              <a:rPr sz="2400" b="0">
+                <a:solidFill>
+                  <a:srgbClr val="067D17"/>
+                </a:solidFill>
+                <a:latin typeface="JetBrains Mono"/>
+                <a:ea typeface="JetBrains Mono"/>
+                <a:cs typeface="JetBrains Mono"/>
+              </a:rPr>
+              <a:t>"  hOAN kIEM lAKE  "</a:t>
+            </a:r>
+            <a:r>
+              <a:rPr sz="2400" b="0">
+                <a:solidFill>
+                  <a:srgbClr val="080808"/>
+                </a:solidFill>
+                <a:latin typeface="Calibri"/>
+                <a:ea typeface="Calibri"/>
+                <a:cs typeface="Calibri"/>
+              </a:rPr>
+              <a:t>; display </a:t>
+            </a:r>
+            <a:r>
+              <a:rPr sz="2400" b="0">
+                <a:solidFill>
+                  <a:srgbClr val="067D17"/>
+                </a:solidFill>
+                <a:latin typeface="JetBrains Mono"/>
+                <a:ea typeface="JetBrains Mono"/>
+                <a:cs typeface="JetBrains Mono"/>
+              </a:rPr>
+              <a:t>"Destination: Hanoi - Vietnam"</a:t>
+            </a:r>
+            <a:r>
+              <a:rPr sz="2400" b="0">
+                <a:solidFill>
+                  <a:srgbClr val="080808"/>
+                </a:solidFill>
+                <a:latin typeface="Calibri"/>
+                <a:ea typeface="Calibri"/>
+                <a:cs typeface="Calibri"/>
+              </a:rPr>
+              <a:t> and </a:t>
+            </a:r>
+            <a:r>
+              <a:rPr sz="2400" b="0">
+                <a:solidFill>
+                  <a:srgbClr val="067D17"/>
+                </a:solidFill>
+                <a:latin typeface="JetBrains Mono"/>
+                <a:ea typeface="JetBrains Mono"/>
+                <a:cs typeface="JetBrains Mono"/>
+              </a:rPr>
+              <a:t>"Visit: Hoan Kiem Lake"</a:t>
             </a:r>
             <a:r>
               <a:rPr sz="2400" b="0">
@@ -8723,29 +8855,7 @@
                 <a:ea typeface="JetBrains Mono"/>
                 <a:cs typeface="JetBrains Mono"/>
               </a:rPr>
-              <a:t>, name, </a:t>
-            </a:r>
-            <a:r>
-              <a:rPr sz="1600">
-                <a:solidFill>
-                  <a:srgbClr val="067D17"/>
-                </a:solidFill>
-                <a:latin typeface="JetBrains Mono"/>
-                <a:ea typeface="JetBrains Mono"/>
-                <a:cs typeface="JetBrains Mono"/>
-              </a:rPr>
-              <a:t>"!"</a:t>
-            </a:r>
-            <a:r>
-              <a:rPr sz="1600">
-                <a:solidFill>
-                  <a:srgbClr val="080808"/>
-                </a:solidFill>
-                <a:latin typeface="JetBrains Mono"/>
-                <a:ea typeface="JetBrains Mono"/>
-                <a:cs typeface="JetBrains Mono"/>
-              </a:rPr>
-              <a:t>)</a:t>
+              <a:t>, name)</a:t>
             </a:r>
           </a:p>
         </p:txBody>
@@ -9056,29 +9166,7 @@
                 <a:ea typeface="JetBrains Mono"/>
                 <a:cs typeface="JetBrains Mono"/>
               </a:rPr>
-              <a:t>, display_name, </a:t>
-            </a:r>
-            <a:r>
-              <a:rPr sz="1800">
-                <a:solidFill>
-                  <a:srgbClr val="067D17"/>
-                </a:solidFill>
-                <a:latin typeface="JetBrains Mono"/>
-                <a:ea typeface="JetBrains Mono"/>
-                <a:cs typeface="JetBrains Mono"/>
-              </a:rPr>
-              <a:t>"!"</a:t>
-            </a:r>
-            <a:r>
-              <a:rPr sz="1800">
-                <a:solidFill>
-                  <a:srgbClr val="080808"/>
-                </a:solidFill>
-                <a:latin typeface="JetBrains Mono"/>
-                <a:ea typeface="JetBrains Mono"/>
-                <a:cs typeface="JetBrains Mono"/>
-              </a:rPr>
-              <a:t>)</a:t>
+              <a:t>, display_name)</a:t>
             </a:r>
           </a:p>
         </p:txBody>

--- a/Mapped Curriculum Lessons/Grade 7/Lesson 12 - Strings and Text/Strings and Text - Slides.pptx
+++ b/Mapped Curriculum Lessons/Grade 7/Lesson 12 - Strings and Text/Strings and Text - Slides.pptx
@@ -2,28 +2,28 @@
 <file path=ppt/presentation.xml><?xml version="1.0" encoding="utf-8"?>
 <p:presentation xmlns:p="http://schemas.openxmlformats.org/presentationml/2006/main" embedTrueTypeFonts="1" saveSubsetFonts="0">
   <p:sldMasterIdLst>
-    <p:sldMasterId xmlns:r="http://schemas.openxmlformats.org/officeDocument/2006/relationships" id="2147483648" r:id="R68358573f5744f89"/>
+    <p:sldMasterId xmlns:r="http://schemas.openxmlformats.org/officeDocument/2006/relationships" id="2147483648" r:id="Rb307e8e3fdfb4837"/>
   </p:sldMasterIdLst>
   <p:notesMasterIdLst>
-    <p:notesMasterId xmlns:r="http://schemas.openxmlformats.org/officeDocument/2006/relationships" r:id="Rb56fd04f1f14491b"/>
+    <p:notesMasterId xmlns:r="http://schemas.openxmlformats.org/officeDocument/2006/relationships" r:id="R83e34a079efa45ee"/>
   </p:notesMasterIdLst>
   <p:sldIdLst>
-    <p:sldId xmlns:r="http://schemas.openxmlformats.org/officeDocument/2006/relationships" id="256" r:id="R1b5bbc6f9e974ca8"/>
-    <p:sldId xmlns:r="http://schemas.openxmlformats.org/officeDocument/2006/relationships" id="257" r:id="R8447c2d261b84f96"/>
-    <p:sldId xmlns:r="http://schemas.openxmlformats.org/officeDocument/2006/relationships" id="258" r:id="Rbaaf08d1904748af"/>
-    <p:sldId xmlns:r="http://schemas.openxmlformats.org/officeDocument/2006/relationships" id="259" r:id="R2d6ae406df6f4afc"/>
-    <p:sldId xmlns:r="http://schemas.openxmlformats.org/officeDocument/2006/relationships" id="260" r:id="R99250e42beea459c"/>
-    <p:sldId xmlns:r="http://schemas.openxmlformats.org/officeDocument/2006/relationships" id="261" r:id="R1358bb7213cf44a0"/>
-    <p:sldId xmlns:r="http://schemas.openxmlformats.org/officeDocument/2006/relationships" id="262" r:id="R3bf8e198175c4ad8"/>
-    <p:sldId xmlns:r="http://schemas.openxmlformats.org/officeDocument/2006/relationships" id="263" r:id="Rfb6bcc9e33014cf0"/>
-    <p:sldId xmlns:r="http://schemas.openxmlformats.org/officeDocument/2006/relationships" id="264" r:id="R87260f0825064206"/>
+    <p:sldId xmlns:r="http://schemas.openxmlformats.org/officeDocument/2006/relationships" id="256" r:id="R52fce3cf2d174a7f"/>
+    <p:sldId xmlns:r="http://schemas.openxmlformats.org/officeDocument/2006/relationships" id="257" r:id="Rcda9d384ce24435c"/>
+    <p:sldId xmlns:r="http://schemas.openxmlformats.org/officeDocument/2006/relationships" id="258" r:id="R7fb2742a5fb24fb8"/>
+    <p:sldId xmlns:r="http://schemas.openxmlformats.org/officeDocument/2006/relationships" id="259" r:id="R5e6c3d657f894ac6"/>
+    <p:sldId xmlns:r="http://schemas.openxmlformats.org/officeDocument/2006/relationships" id="260" r:id="R288874b2fada4db2"/>
+    <p:sldId xmlns:r="http://schemas.openxmlformats.org/officeDocument/2006/relationships" id="261" r:id="R4874b76f34b14fb4"/>
+    <p:sldId xmlns:r="http://schemas.openxmlformats.org/officeDocument/2006/relationships" id="262" r:id="R905a526a2e374d24"/>
+    <p:sldId xmlns:r="http://schemas.openxmlformats.org/officeDocument/2006/relationships" id="263" r:id="Rc9f63d4ee3b84af9"/>
+    <p:sldId xmlns:r="http://schemas.openxmlformats.org/officeDocument/2006/relationships" id="264" r:id="R125db858976946d8"/>
   </p:sldIdLst>
   <p:sldSz cx="12192000" cy="6858000"/>
   <p:notesSz cx="6858000" cy="9144000"/>
   <p:embeddedFontLst>
     <p:embeddedFont>
       <p:font typeface="JetBrains Mono"/>
-      <p:regular xmlns:r="http://schemas.openxmlformats.org/officeDocument/2006/relationships" r:id="Rf964a765221248a1"/>
+      <p:regular xmlns:r="http://schemas.openxmlformats.org/officeDocument/2006/relationships" r:id="R8c18f4c2ff64499b"/>
     </p:embeddedFont>
   </p:embeddedFontLst>
 </p:presentation>
@@ -1071,7 +1071,7 @@
           <p:nvPr/>
         </p:nvPicPr>
         <p:blipFill rotWithShape="1">
-          <a:blip xmlns:r="http://schemas.openxmlformats.org/officeDocument/2006/relationships" xmlns:a="http://schemas.openxmlformats.org/drawingml/2006/main" r:embed="R26b5031e4b014257"/>
+          <a:blip xmlns:r="http://schemas.openxmlformats.org/officeDocument/2006/relationships" xmlns:a="http://schemas.openxmlformats.org/drawingml/2006/main" r:embed="Rc4b2403ac12f41b0"/>
           <a:stretch xmlns:a="http://schemas.openxmlformats.org/drawingml/2006/main"/>
         </p:blipFill>
         <p:spPr>
@@ -1451,7 +1451,7 @@
           <p:nvPr/>
         </p:nvPicPr>
         <p:blipFill rotWithShape="1">
-          <a:blip xmlns:r="http://schemas.openxmlformats.org/officeDocument/2006/relationships" xmlns:a="http://schemas.openxmlformats.org/drawingml/2006/main" r:embed="R7f14e0fcd8514628">
+          <a:blip xmlns:r="http://schemas.openxmlformats.org/officeDocument/2006/relationships" xmlns:a="http://schemas.openxmlformats.org/drawingml/2006/main" r:embed="Rf6eb63c7b35e4c2d">
             <a:alphaModFix amt="28000"/>
           </a:blip>
           <a:stretch xmlns:a="http://schemas.openxmlformats.org/drawingml/2006/main"/>
@@ -1664,7 +1664,7 @@
           <p:nvPr/>
         </p:nvPicPr>
         <p:blipFill rotWithShape="1">
-          <a:blip xmlns:r="http://schemas.openxmlformats.org/officeDocument/2006/relationships" xmlns:a="http://schemas.openxmlformats.org/drawingml/2006/main" r:embed="Ra600fe807eb0412d">
+          <a:blip xmlns:r="http://schemas.openxmlformats.org/officeDocument/2006/relationships" xmlns:a="http://schemas.openxmlformats.org/drawingml/2006/main" r:embed="R6612dfa44ade4c91">
             <a:alphaModFix amt="28000"/>
           </a:blip>
           <a:stretch xmlns:a="http://schemas.openxmlformats.org/drawingml/2006/main"/>
@@ -1899,7 +1899,7 @@
           <p:nvPr/>
         </p:nvPicPr>
         <p:blipFill rotWithShape="1">
-          <a:blip xmlns:r="http://schemas.openxmlformats.org/officeDocument/2006/relationships" xmlns:a="http://schemas.openxmlformats.org/drawingml/2006/main" r:embed="R15f37684ecc14722">
+          <a:blip xmlns:r="http://schemas.openxmlformats.org/officeDocument/2006/relationships" xmlns:a="http://schemas.openxmlformats.org/drawingml/2006/main" r:embed="R6786f045f45c49ff">
             <a:alphaModFix amt="28000"/>
           </a:blip>
           <a:stretch xmlns:a="http://schemas.openxmlformats.org/drawingml/2006/main"/>
@@ -2176,7 +2176,7 @@
           <p:nvPr/>
         </p:nvPicPr>
         <p:blipFill rotWithShape="1">
-          <a:blip xmlns:r="http://schemas.openxmlformats.org/officeDocument/2006/relationships" xmlns:a="http://schemas.openxmlformats.org/drawingml/2006/main" r:embed="R70ba2f5fe4d643d9">
+          <a:blip xmlns:r="http://schemas.openxmlformats.org/officeDocument/2006/relationships" xmlns:a="http://schemas.openxmlformats.org/drawingml/2006/main" r:embed="Rfad7640841f14175">
             <a:alphaModFix amt="28000"/>
           </a:blip>
           <a:stretch xmlns:a="http://schemas.openxmlformats.org/drawingml/2006/main"/>
@@ -2451,7 +2451,7 @@
           <p:nvPr/>
         </p:nvPicPr>
         <p:blipFill rotWithShape="1">
-          <a:blip xmlns:r="http://schemas.openxmlformats.org/officeDocument/2006/relationships" xmlns:a="http://schemas.openxmlformats.org/drawingml/2006/main" r:embed="R231672bc682a4b49">
+          <a:blip xmlns:r="http://schemas.openxmlformats.org/officeDocument/2006/relationships" xmlns:a="http://schemas.openxmlformats.org/drawingml/2006/main" r:embed="Rd775993e3db54c83">
             <a:alphaModFix amt="28000"/>
           </a:blip>
           <a:stretch xmlns:a="http://schemas.openxmlformats.org/drawingml/2006/main"/>
@@ -2875,7 +2875,7 @@
           <p:nvPr/>
         </p:nvPicPr>
         <p:blipFill rotWithShape="1">
-          <a:blip xmlns:r="http://schemas.openxmlformats.org/officeDocument/2006/relationships" xmlns:a="http://schemas.openxmlformats.org/drawingml/2006/main" r:embed="Rbd8c5b3d15f74a43">
+          <a:blip xmlns:r="http://schemas.openxmlformats.org/officeDocument/2006/relationships" xmlns:a="http://schemas.openxmlformats.org/drawingml/2006/main" r:embed="R5a89db6a43ce4ea0">
             <a:alphaModFix amt="28000"/>
           </a:blip>
           <a:stretch xmlns:a="http://schemas.openxmlformats.org/drawingml/2006/main"/>
@@ -3016,7 +3016,7 @@
           <p:nvPr/>
         </p:nvPicPr>
         <p:blipFill rotWithShape="1">
-          <a:blip xmlns:r="http://schemas.openxmlformats.org/officeDocument/2006/relationships" xmlns:a="http://schemas.openxmlformats.org/drawingml/2006/main" r:embed="R86fe45993cec451c">
+          <a:blip xmlns:r="http://schemas.openxmlformats.org/officeDocument/2006/relationships" xmlns:a="http://schemas.openxmlformats.org/drawingml/2006/main" r:embed="Ra964658a07fb47ee">
             <a:alphaModFix amt="28000"/>
           </a:blip>
           <a:stretch xmlns:a="http://schemas.openxmlformats.org/drawingml/2006/main"/>
@@ -3130,7 +3130,7 @@
           <p:nvPr/>
         </p:nvPicPr>
         <p:blipFill rotWithShape="1">
-          <a:blip xmlns:r="http://schemas.openxmlformats.org/officeDocument/2006/relationships" xmlns:a="http://schemas.openxmlformats.org/drawingml/2006/main" r:embed="R8fd7ee8431dc4091">
+          <a:blip xmlns:r="http://schemas.openxmlformats.org/officeDocument/2006/relationships" xmlns:a="http://schemas.openxmlformats.org/drawingml/2006/main" r:embed="Rea0cd0123d044b19">
             <a:alphaModFix amt="28000"/>
           </a:blip>
           <a:stretch xmlns:a="http://schemas.openxmlformats.org/drawingml/2006/main"/>
@@ -3457,7 +3457,7 @@
           <p:nvPr/>
         </p:nvPicPr>
         <p:blipFill rotWithShape="1">
-          <a:blip xmlns:r="http://schemas.openxmlformats.org/officeDocument/2006/relationships" xmlns:a="http://schemas.openxmlformats.org/drawingml/2006/main" r:embed="Rc27fb0f7fe1446e7">
+          <a:blip xmlns:r="http://schemas.openxmlformats.org/officeDocument/2006/relationships" xmlns:a="http://schemas.openxmlformats.org/drawingml/2006/main" r:embed="R46eec6739fab40f3">
             <a:alphaModFix amt="28000"/>
           </a:blip>
           <a:stretch xmlns:a="http://schemas.openxmlformats.org/drawingml/2006/main"/>
@@ -3745,7 +3745,7 @@
           <p:nvPr/>
         </p:nvPicPr>
         <p:blipFill rotWithShape="1">
-          <a:blip xmlns:r="http://schemas.openxmlformats.org/officeDocument/2006/relationships" xmlns:a="http://schemas.openxmlformats.org/drawingml/2006/main" r:embed="Rc37db307036049d7">
+          <a:blip xmlns:r="http://schemas.openxmlformats.org/officeDocument/2006/relationships" xmlns:a="http://schemas.openxmlformats.org/drawingml/2006/main" r:embed="R5a6f2374bc5143c0">
             <a:alphaModFix amt="28000"/>
           </a:blip>
           <a:stretch xmlns:a="http://schemas.openxmlformats.org/drawingml/2006/main"/>
@@ -3982,17 +3982,17 @@
   </p:cSld>
   <p:clrMap bg1="lt1" tx1="dk1" bg2="lt2" tx2="dk2" accent1="accent1" accent2="accent2" accent3="accent3" accent4="accent4" accent5="accent5" accent6="accent6" hlink="hlink" folHlink="folHlink"/>
   <p:sldLayoutIdLst>
-    <p:sldLayoutId xmlns:r="http://schemas.openxmlformats.org/officeDocument/2006/relationships" id="2147483649" r:id="R75554ac7d41c450e"/>
-    <p:sldLayoutId xmlns:r="http://schemas.openxmlformats.org/officeDocument/2006/relationships" id="2147483650" r:id="R095e7d5bb3b243b6"/>
-    <p:sldLayoutId xmlns:r="http://schemas.openxmlformats.org/officeDocument/2006/relationships" id="2147483651" r:id="R2a09653687c44976"/>
-    <p:sldLayoutId xmlns:r="http://schemas.openxmlformats.org/officeDocument/2006/relationships" id="2147483652" r:id="Rdd872d16bf9c4162"/>
-    <p:sldLayoutId xmlns:r="http://schemas.openxmlformats.org/officeDocument/2006/relationships" id="2147483653" r:id="Rfaaa0b98d7794608"/>
-    <p:sldLayoutId xmlns:r="http://schemas.openxmlformats.org/officeDocument/2006/relationships" id="2147483654" r:id="R4c4d04c863a648e3"/>
-    <p:sldLayoutId xmlns:r="http://schemas.openxmlformats.org/officeDocument/2006/relationships" id="2147483655" r:id="R6ef3e8f10e27485a"/>
-    <p:sldLayoutId xmlns:r="http://schemas.openxmlformats.org/officeDocument/2006/relationships" id="2147483656" r:id="R3c140c3f053e41fb"/>
-    <p:sldLayoutId xmlns:r="http://schemas.openxmlformats.org/officeDocument/2006/relationships" id="2147483657" r:id="R124da69b298b4991"/>
-    <p:sldLayoutId xmlns:r="http://schemas.openxmlformats.org/officeDocument/2006/relationships" id="2147483658" r:id="R56f7e89642cc4bfa"/>
-    <p:sldLayoutId xmlns:r="http://schemas.openxmlformats.org/officeDocument/2006/relationships" id="2147483659" r:id="R422794da8800423b"/>
+    <p:sldLayoutId xmlns:r="http://schemas.openxmlformats.org/officeDocument/2006/relationships" id="2147483649" r:id="R5f12e647d5084778"/>
+    <p:sldLayoutId xmlns:r="http://schemas.openxmlformats.org/officeDocument/2006/relationships" id="2147483650" r:id="R14b9a990f9694814"/>
+    <p:sldLayoutId xmlns:r="http://schemas.openxmlformats.org/officeDocument/2006/relationships" id="2147483651" r:id="Ra9f8fbe1839b4b4c"/>
+    <p:sldLayoutId xmlns:r="http://schemas.openxmlformats.org/officeDocument/2006/relationships" id="2147483652" r:id="Rd90477b8513c4047"/>
+    <p:sldLayoutId xmlns:r="http://schemas.openxmlformats.org/officeDocument/2006/relationships" id="2147483653" r:id="R3b6e91d11b3a4bf3"/>
+    <p:sldLayoutId xmlns:r="http://schemas.openxmlformats.org/officeDocument/2006/relationships" id="2147483654" r:id="R00c0803ebd8e425d"/>
+    <p:sldLayoutId xmlns:r="http://schemas.openxmlformats.org/officeDocument/2006/relationships" id="2147483655" r:id="R49b6d88ab1ca43ba"/>
+    <p:sldLayoutId xmlns:r="http://schemas.openxmlformats.org/officeDocument/2006/relationships" id="2147483656" r:id="Rf673eafcf94841c4"/>
+    <p:sldLayoutId xmlns:r="http://schemas.openxmlformats.org/officeDocument/2006/relationships" id="2147483657" r:id="Re64f01a291ce4e96"/>
+    <p:sldLayoutId xmlns:r="http://schemas.openxmlformats.org/officeDocument/2006/relationships" id="2147483658" r:id="R0662efe75b0a4099"/>
+    <p:sldLayoutId xmlns:r="http://schemas.openxmlformats.org/officeDocument/2006/relationships" id="2147483659" r:id="R83d4bd07ad2944e2"/>
   </p:sldLayoutIdLst>
   <p:hf hdr="0" ftr="0" dt="0"/>
   <p:txStyles>
@@ -6853,18 +6853,21 @@
                 <a:ea typeface="Calibri"/>
                 <a:cs typeface="Calibri"/>
               </a:rPr>
-              <a:t>Use </a:t>
-            </a:r>
-            <a:r>
-              <a:rPr sz="2400" b="0">
-                <a:solidFill>
-                  <a:srgbClr val="1750EB"/>
-                </a:solidFill>
-                <a:latin typeface="JetBrains Mono"/>
-                <a:ea typeface="JetBrains Mono"/>
-                <a:cs typeface="JetBrains Mono"/>
-              </a:rPr>
-              <a:t>strip()</a:t>
+              <a:t>Change the example so it keeps the name exactly as typed in </a:t>
+            </a:r>
+            <a:r>
+              <a:rPr sz="2050" b="0">
+                <a:solidFill>
+                  <a:srgbClr val="6A1B9A"/>
+                </a:solidFill>
+                <a:highlight>
+                  <a:srgbClr val="ECEAF4"/>
+                </a:highlight>
+                <a:latin typeface="JetBrains Mono"/>
+                <a:ea typeface="JetBrains Mono"/>
+                <a:cs typeface="JetBrains Mono"/>
+              </a:rPr>
+              <a:t> name </a:t>
             </a:r>
             <a:r>
               <a:rPr sz="2400" b="0">
@@ -6875,10 +6878,10 @@
                 <a:ea typeface="Calibri"/>
                 <a:cs typeface="Calibri"/>
               </a:rPr>
-              <a:t> and </a:t>
-            </a:r>
-            <a:r>
-              <a:rPr sz="2400" b="0">
+              <a:t> and stores the result of </a:t>
+            </a:r>
+            <a:r>
+              <a:rPr sz="2050" b="0">
                 <a:solidFill>
                   <a:srgbClr val="1750EB"/>
                 </a:solidFill>
@@ -6886,7 +6889,7 @@
                 <a:ea typeface="JetBrains Mono"/>
                 <a:cs typeface="JetBrains Mono"/>
               </a:rPr>
-              <a:t>title()</a:t>
+              <a:t>strip()</a:t>
             </a:r>
             <a:r>
               <a:rPr sz="2400" b="0">
@@ -6897,18 +6900,18 @@
                 <a:ea typeface="Calibri"/>
                 <a:cs typeface="Calibri"/>
               </a:rPr>
-              <a:t> on [name], then store the result in a new variable called [clean_name]. Display [clean_name]. The input </a:t>
-            </a:r>
-            <a:r>
-              <a:rPr sz="2400" b="0">
-                <a:solidFill>
-                  <a:srgbClr val="067D17"/>
-                </a:solidFill>
-                <a:latin typeface="JetBrains Mono"/>
-                <a:ea typeface="JetBrains Mono"/>
-                <a:cs typeface="JetBrains Mono"/>
-              </a:rPr>
-              <a:t>"  aLEX  "</a:t>
+              <a:t> and </a:t>
+            </a:r>
+            <a:r>
+              <a:rPr sz="2050" b="0">
+                <a:solidFill>
+                  <a:srgbClr val="1750EB"/>
+                </a:solidFill>
+                <a:latin typeface="JetBrains Mono"/>
+                <a:ea typeface="JetBrains Mono"/>
+                <a:cs typeface="JetBrains Mono"/>
+              </a:rPr>
+              <a:t>title()</a:t>
             </a:r>
             <a:r>
               <a:rPr sz="2400" b="0">
@@ -6919,10 +6922,173 @@
                 <a:ea typeface="Calibri"/>
                 <a:cs typeface="Calibri"/>
               </a:rPr>
-              <a:t> must display </a:t>
+              <a:t> in </a:t>
+            </a:r>
+            <a:r>
+              <a:rPr sz="2050" b="0">
+                <a:solidFill>
+                  <a:srgbClr val="6A1B9A"/>
+                </a:solidFill>
+                <a:highlight>
+                  <a:srgbClr val="ECEAF4"/>
+                </a:highlight>
+                <a:latin typeface="JetBrains Mono"/>
+                <a:ea typeface="JetBrains Mono"/>
+                <a:cs typeface="JetBrains Mono"/>
+              </a:rPr>
+              <a:t> clean_name </a:t>
             </a:r>
             <a:r>
               <a:rPr sz="2400" b="0">
+                <a:solidFill>
+                  <a:srgbClr val="080808"/>
+                </a:solidFill>
+                <a:latin typeface="Calibri"/>
+                <a:ea typeface="Calibri"/>
+                <a:cs typeface="Calibri"/>
+              </a:rPr>
+              <a:t>. Display </a:t>
+            </a:r>
+            <a:r>
+              <a:rPr sz="2050" b="0">
+                <a:solidFill>
+                  <a:srgbClr val="067D17"/>
+                </a:solidFill>
+                <a:latin typeface="JetBrains Mono"/>
+                <a:ea typeface="JetBrains Mono"/>
+                <a:cs typeface="JetBrains Mono"/>
+              </a:rPr>
+              <a:t>"You typed:"</a:t>
+            </a:r>
+            <a:r>
+              <a:rPr sz="2400" b="0">
+                <a:solidFill>
+                  <a:srgbClr val="080808"/>
+                </a:solidFill>
+                <a:latin typeface="Calibri"/>
+                <a:ea typeface="Calibri"/>
+                <a:cs typeface="Calibri"/>
+              </a:rPr>
+              <a:t> followed by </a:t>
+            </a:r>
+            <a:r>
+              <a:rPr sz="2050" b="0">
+                <a:solidFill>
+                  <a:srgbClr val="6A1B9A"/>
+                </a:solidFill>
+                <a:highlight>
+                  <a:srgbClr val="ECEAF4"/>
+                </a:highlight>
+                <a:latin typeface="JetBrains Mono"/>
+                <a:ea typeface="JetBrains Mono"/>
+                <a:cs typeface="JetBrains Mono"/>
+              </a:rPr>
+              <a:t> name </a:t>
+            </a:r>
+            <a:r>
+              <a:rPr sz="2400" b="0">
+                <a:solidFill>
+                  <a:srgbClr val="080808"/>
+                </a:solidFill>
+                <a:latin typeface="Calibri"/>
+                <a:ea typeface="Calibri"/>
+                <a:cs typeface="Calibri"/>
+              </a:rPr>
+              <a:t>, then </a:t>
+            </a:r>
+            <a:r>
+              <a:rPr sz="2050" b="0">
+                <a:solidFill>
+                  <a:srgbClr val="067D17"/>
+                </a:solidFill>
+                <a:latin typeface="JetBrains Mono"/>
+                <a:ea typeface="JetBrains Mono"/>
+                <a:cs typeface="JetBrains Mono"/>
+              </a:rPr>
+              <a:t>"Hello,"</a:t>
+            </a:r>
+            <a:r>
+              <a:rPr sz="2400" b="0">
+                <a:solidFill>
+                  <a:srgbClr val="080808"/>
+                </a:solidFill>
+                <a:latin typeface="Calibri"/>
+                <a:ea typeface="Calibri"/>
+                <a:cs typeface="Calibri"/>
+              </a:rPr>
+              <a:t> followed by </a:t>
+            </a:r>
+            <a:r>
+              <a:rPr sz="2050" b="0">
+                <a:solidFill>
+                  <a:srgbClr val="6A1B9A"/>
+                </a:solidFill>
+                <a:highlight>
+                  <a:srgbClr val="ECEAF4"/>
+                </a:highlight>
+                <a:latin typeface="JetBrains Mono"/>
+                <a:ea typeface="JetBrains Mono"/>
+                <a:cs typeface="JetBrains Mono"/>
+              </a:rPr>
+              <a:t> clean_name </a:t>
+            </a:r>
+            <a:r>
+              <a:rPr sz="2400" b="0">
+                <a:solidFill>
+                  <a:srgbClr val="080808"/>
+                </a:solidFill>
+                <a:latin typeface="Calibri"/>
+                <a:ea typeface="Calibri"/>
+                <a:cs typeface="Calibri"/>
+              </a:rPr>
+              <a:t>. For example, </a:t>
+            </a:r>
+            <a:r>
+              <a:rPr sz="2050" b="0">
+                <a:solidFill>
+                  <a:srgbClr val="067D17"/>
+                </a:solidFill>
+                <a:latin typeface="JetBrains Mono"/>
+                <a:ea typeface="JetBrains Mono"/>
+                <a:cs typeface="JetBrains Mono"/>
+              </a:rPr>
+              <a:t>"aLEX"</a:t>
+            </a:r>
+            <a:r>
+              <a:rPr sz="2400" b="0">
+                <a:solidFill>
+                  <a:srgbClr val="080808"/>
+                </a:solidFill>
+                <a:latin typeface="Calibri"/>
+                <a:ea typeface="Calibri"/>
+                <a:cs typeface="Calibri"/>
+              </a:rPr>
+              <a:t> displays </a:t>
+            </a:r>
+            <a:r>
+              <a:rPr sz="2050" b="0">
+                <a:solidFill>
+                  <a:srgbClr val="067D17"/>
+                </a:solidFill>
+                <a:latin typeface="JetBrains Mono"/>
+                <a:ea typeface="JetBrains Mono"/>
+                <a:cs typeface="JetBrains Mono"/>
+              </a:rPr>
+              <a:t>"You typed: aLEX"</a:t>
+            </a:r>
+            <a:r>
+              <a:rPr sz="2400" b="0">
+                <a:solidFill>
+                  <a:srgbClr val="080808"/>
+                </a:solidFill>
+                <a:latin typeface="Calibri"/>
+                <a:ea typeface="Calibri"/>
+                <a:cs typeface="Calibri"/>
+              </a:rPr>
+              <a:t> and </a:t>
+            </a:r>
+            <a:r>
+              <a:rPr sz="2050" b="0">
                 <a:solidFill>
                   <a:srgbClr val="067D17"/>
                 </a:solidFill>
@@ -7511,18 +7677,21 @@
                 <a:ea typeface="Calibri"/>
                 <a:cs typeface="Calibri"/>
               </a:rPr>
-              <a:t>Ask for a first name and store it in [name]. Ask for a surname and store it in [surname]. Apply </a:t>
-            </a:r>
-            <a:r>
-              <a:rPr sz="2400" b="0">
-                <a:solidFill>
-                  <a:srgbClr val="1750EB"/>
-                </a:solidFill>
-                <a:latin typeface="JetBrains Mono"/>
-                <a:ea typeface="JetBrains Mono"/>
-                <a:cs typeface="JetBrains Mono"/>
-              </a:rPr>
-              <a:t>strip()</a:t>
+              <a:t>Extend the example so it also asks for a surname in </a:t>
+            </a:r>
+            <a:r>
+              <a:rPr sz="2050" b="0">
+                <a:solidFill>
+                  <a:srgbClr val="6A1B9A"/>
+                </a:solidFill>
+                <a:highlight>
+                  <a:srgbClr val="ECEAF4"/>
+                </a:highlight>
+                <a:latin typeface="JetBrains Mono"/>
+                <a:ea typeface="JetBrains Mono"/>
+                <a:cs typeface="JetBrains Mono"/>
+              </a:rPr>
+              <a:t> surname </a:t>
             </a:r>
             <a:r>
               <a:rPr sz="2400" b="0">
@@ -7533,10 +7702,10 @@
                 <a:ea typeface="Calibri"/>
                 <a:cs typeface="Calibri"/>
               </a:rPr>
-              <a:t> and </a:t>
-            </a:r>
-            <a:r>
-              <a:rPr sz="2400" b="0">
+              <a:t>. Use </a:t>
+            </a:r>
+            <a:r>
+              <a:rPr sz="2050" b="0">
                 <a:solidFill>
                   <a:srgbClr val="1750EB"/>
                 </a:solidFill>
@@ -7544,7 +7713,7 @@
                 <a:ea typeface="JetBrains Mono"/>
                 <a:cs typeface="JetBrains Mono"/>
               </a:rPr>
-              <a:t>title()</a:t>
+              <a:t>strip()</a:t>
             </a:r>
             <a:r>
               <a:rPr sz="2400" b="0">
@@ -7555,18 +7724,18 @@
                 <a:ea typeface="Calibri"/>
                 <a:cs typeface="Calibri"/>
               </a:rPr>
-              <a:t> to both variables, then display the full name. Test </a:t>
-            </a:r>
-            <a:r>
-              <a:rPr sz="2400" b="0">
-                <a:solidFill>
-                  <a:srgbClr val="067D17"/>
-                </a:solidFill>
-                <a:latin typeface="JetBrains Mono"/>
-                <a:ea typeface="JetBrains Mono"/>
-                <a:cs typeface="JetBrains Mono"/>
-              </a:rPr>
-              <a:t>"  aLEX  "</a:t>
+              <a:t> and </a:t>
+            </a:r>
+            <a:r>
+              <a:rPr sz="2050" b="0">
+                <a:solidFill>
+                  <a:srgbClr val="1750EB"/>
+                </a:solidFill>
+                <a:latin typeface="JetBrains Mono"/>
+                <a:ea typeface="JetBrains Mono"/>
+                <a:cs typeface="JetBrains Mono"/>
+              </a:rPr>
+              <a:t>title()</a:t>
             </a:r>
             <a:r>
               <a:rPr sz="2400" b="0">
@@ -7577,10 +7746,10 @@
                 <a:ea typeface="Calibri"/>
                 <a:cs typeface="Calibri"/>
               </a:rPr>
-              <a:t> and </a:t>
-            </a:r>
-            <a:r>
-              <a:rPr sz="2400" b="0">
+              <a:t> on the surname too, then display </a:t>
+            </a:r>
+            <a:r>
+              <a:rPr sz="2050" b="0">
                 <a:solidFill>
                   <a:srgbClr val="067D17"/>
                 </a:solidFill>
@@ -7588,7 +7757,7 @@
                 <a:ea typeface="JetBrains Mono"/>
                 <a:cs typeface="JetBrains Mono"/>
               </a:rPr>
-              <a:t>"  nGUYEN  "</a:t>
+              <a:t>"Hello,"</a:t>
             </a:r>
             <a:r>
               <a:rPr sz="2400" b="0">
@@ -7599,10 +7768,54 @@
                 <a:ea typeface="Calibri"/>
                 <a:cs typeface="Calibri"/>
               </a:rPr>
-              <a:t>; display </a:t>
+              <a:t> followed by both names. For example, </a:t>
+            </a:r>
+            <a:r>
+              <a:rPr sz="2050" b="0">
+                <a:solidFill>
+                  <a:srgbClr val="067D17"/>
+                </a:solidFill>
+                <a:latin typeface="JetBrains Mono"/>
+                <a:ea typeface="JetBrains Mono"/>
+                <a:cs typeface="JetBrains Mono"/>
+              </a:rPr>
+              <a:t>"  aLEX  "</a:t>
             </a:r>
             <a:r>
               <a:rPr sz="2400" b="0">
+                <a:solidFill>
+                  <a:srgbClr val="080808"/>
+                </a:solidFill>
+                <a:latin typeface="Calibri"/>
+                <a:ea typeface="Calibri"/>
+                <a:cs typeface="Calibri"/>
+              </a:rPr>
+              <a:t> and </a:t>
+            </a:r>
+            <a:r>
+              <a:rPr sz="2050" b="0">
+                <a:solidFill>
+                  <a:srgbClr val="067D17"/>
+                </a:solidFill>
+                <a:latin typeface="JetBrains Mono"/>
+                <a:ea typeface="JetBrains Mono"/>
+                <a:cs typeface="JetBrains Mono"/>
+              </a:rPr>
+              <a:t>"  nGUYEN  "</a:t>
+            </a:r>
+            <a:r>
+              <a:rPr sz="2400" b="0">
+                <a:solidFill>
+                  <a:srgbClr val="080808"/>
+                </a:solidFill>
+                <a:latin typeface="Calibri"/>
+                <a:ea typeface="Calibri"/>
+                <a:cs typeface="Calibri"/>
+              </a:rPr>
+              <a:t> display </a:t>
+            </a:r>
+            <a:r>
+              <a:rPr sz="2050" b="0">
                 <a:solidFill>
                   <a:srgbClr val="067D17"/>
                 </a:solidFill>
@@ -8172,7 +8385,7 @@
         </p:spPr>
         <p:txBody>
           <a:bodyPr xmlns:a="http://schemas.openxmlformats.org/drawingml/2006/main">
-            <a:normAutofit fontScale="82745"/>
+            <a:normAutofit fontScale="100000"/>
           </a:bodyPr>
           <a:lstStyle xmlns:a="http://schemas.openxmlformats.org/drawingml/2006/main"/>
           <a:p xmlns:a="http://schemas.openxmlformats.org/drawingml/2006/main">
@@ -8191,10 +8404,10 @@
                 <a:ea typeface="Calibri"/>
                 <a:cs typeface="Calibri"/>
               </a:rPr>
-              <a:t>Ask for a city, country and landmark and store the answers in [city], [country] and [landmark]. Apply </a:t>
-            </a:r>
-            <a:r>
-              <a:rPr sz="2400" b="0">
+              <a:t>Create a destination program that asks for a city, a country and a landmark. Use </a:t>
+            </a:r>
+            <a:r>
+              <a:rPr sz="2050" b="0">
                 <a:solidFill>
                   <a:srgbClr val="1750EB"/>
                 </a:solidFill>
@@ -8216,7 +8429,7 @@
               <a:t> and </a:t>
             </a:r>
             <a:r>
-              <a:rPr sz="2400" b="0">
+              <a:rPr sz="2050" b="0">
                 <a:solidFill>
                   <a:srgbClr val="1750EB"/>
                 </a:solidFill>
@@ -8235,10 +8448,10 @@
                 <a:ea typeface="Calibri"/>
                 <a:cs typeface="Calibri"/>
               </a:rPr>
-              <a:t> to all three variables. Display the city and country on a line beginning </a:t>
-            </a:r>
-            <a:r>
-              <a:rPr sz="2400" b="0">
+              <a:t> on each answer. Display </a:t>
+            </a:r>
+            <a:r>
+              <a:rPr sz="2050" b="0">
                 <a:solidFill>
                   <a:srgbClr val="067D17"/>
                 </a:solidFill>
@@ -8257,10 +8470,10 @@
                 <a:ea typeface="Calibri"/>
                 <a:cs typeface="Calibri"/>
               </a:rPr>
-              <a:t>. Display the landmark on a second line beginning </a:t>
-            </a:r>
-            <a:r>
-              <a:rPr sz="2400" b="0">
+              <a:t> with the city and country separated by </a:t>
+            </a:r>
+            <a:r>
+              <a:rPr sz="2050" b="0">
                 <a:solidFill>
                   <a:srgbClr val="067D17"/>
                 </a:solidFill>
@@ -8268,7 +8481,7 @@
                 <a:ea typeface="JetBrains Mono"/>
                 <a:cs typeface="JetBrains Mono"/>
               </a:rPr>
-              <a:t>"Visit:"</a:t>
+              <a:t>"-"</a:t>
             </a:r>
             <a:r>
               <a:rPr sz="2400" b="0">
@@ -8279,10 +8492,10 @@
                 <a:ea typeface="Calibri"/>
                 <a:cs typeface="Calibri"/>
               </a:rPr>
-              <a:t>. Test </a:t>
-            </a:r>
-            <a:r>
-              <a:rPr sz="2400" b="0">
+              <a:t>, then </a:t>
+            </a:r>
+            <a:r>
+              <a:rPr sz="2050" b="0">
                 <a:solidFill>
                   <a:srgbClr val="067D17"/>
                 </a:solidFill>
@@ -8290,7 +8503,7 @@
                 <a:ea typeface="JetBrains Mono"/>
                 <a:cs typeface="JetBrains Mono"/>
               </a:rPr>
-              <a:t>"  hANOI  "</a:t>
+              <a:t>"Visit:"</a:t>
             </a:r>
             <a:r>
               <a:rPr sz="2400" b="0">
@@ -8301,10 +8514,10 @@
                 <a:ea typeface="Calibri"/>
                 <a:cs typeface="Calibri"/>
               </a:rPr>
-              <a:t>, </a:t>
-            </a:r>
-            <a:r>
-              <a:rPr sz="2400" b="0">
+              <a:t> with the landmark. For example, </a:t>
+            </a:r>
+            <a:r>
+              <a:rPr sz="2050" b="0">
                 <a:solidFill>
                   <a:srgbClr val="067D17"/>
                 </a:solidFill>
@@ -8312,7 +8525,7 @@
                 <a:ea typeface="JetBrains Mono"/>
                 <a:cs typeface="JetBrains Mono"/>
               </a:rPr>
-              <a:t>"  vIETNAM  "</a:t>
+              <a:t>"  hANOI  "</a:t>
             </a:r>
             <a:r>
               <a:rPr sz="2400" b="0">
@@ -8326,7 +8539,7 @@
               <a:t> and </a:t>
             </a:r>
             <a:r>
-              <a:rPr sz="2400" b="0">
+              <a:rPr sz="2050" b="0">
                 <a:solidFill>
                   <a:srgbClr val="067D17"/>
                 </a:solidFill>
@@ -8334,7 +8547,7 @@
                 <a:ea typeface="JetBrains Mono"/>
                 <a:cs typeface="JetBrains Mono"/>
               </a:rPr>
-              <a:t>"  hOAN kIEM lAKE  "</a:t>
+              <a:t>"  vIETNAM  "</a:t>
             </a:r>
             <a:r>
               <a:rPr sz="2400" b="0">
@@ -8345,10 +8558,10 @@
                 <a:ea typeface="Calibri"/>
                 <a:cs typeface="Calibri"/>
               </a:rPr>
-              <a:t>; display </a:t>
-            </a:r>
-            <a:r>
-              <a:rPr sz="2400" b="0">
+              <a:t> give </a:t>
+            </a:r>
+            <a:r>
+              <a:rPr sz="2050" b="0">
                 <a:solidFill>
                   <a:srgbClr val="067D17"/>
                 </a:solidFill>
@@ -8357,28 +8570,6 @@
                 <a:cs typeface="JetBrains Mono"/>
               </a:rPr>
               <a:t>"Destination: Hanoi - Vietnam"</a:t>
-            </a:r>
-            <a:r>
-              <a:rPr sz="2400" b="0">
-                <a:solidFill>
-                  <a:srgbClr val="080808"/>
-                </a:solidFill>
-                <a:latin typeface="Calibri"/>
-                <a:ea typeface="Calibri"/>
-                <a:cs typeface="Calibri"/>
-              </a:rPr>
-              <a:t> and </a:t>
-            </a:r>
-            <a:r>
-              <a:rPr sz="2400" b="0">
-                <a:solidFill>
-                  <a:srgbClr val="067D17"/>
-                </a:solidFill>
-                <a:latin typeface="JetBrains Mono"/>
-                <a:ea typeface="JetBrains Mono"/>
-                <a:cs typeface="JetBrains Mono"/>
-              </a:rPr>
-              <a:t>"Visit: Hoan Kiem Lake"</a:t>
             </a:r>
             <a:r>
               <a:rPr sz="2400" b="0">

--- a/Mapped Curriculum Lessons/Grade 7/Lesson 12 - Strings and Text/Strings and Text - Slides.pptx
+++ b/Mapped Curriculum Lessons/Grade 7/Lesson 12 - Strings and Text/Strings and Text - Slides.pptx
@@ -2,28 +2,28 @@
 <file path=ppt/presentation.xml><?xml version="1.0" encoding="utf-8"?>
 <p:presentation xmlns:p="http://schemas.openxmlformats.org/presentationml/2006/main" embedTrueTypeFonts="1" saveSubsetFonts="0">
   <p:sldMasterIdLst>
-    <p:sldMasterId xmlns:r="http://schemas.openxmlformats.org/officeDocument/2006/relationships" id="2147483648" r:id="Rb307e8e3fdfb4837"/>
+    <p:sldMasterId xmlns:r="http://schemas.openxmlformats.org/officeDocument/2006/relationships" id="2147483648" r:id="Rd761cbff25114396"/>
   </p:sldMasterIdLst>
   <p:notesMasterIdLst>
-    <p:notesMasterId xmlns:r="http://schemas.openxmlformats.org/officeDocument/2006/relationships" r:id="R83e34a079efa45ee"/>
+    <p:notesMasterId xmlns:r="http://schemas.openxmlformats.org/officeDocument/2006/relationships" r:id="R3716b3ad417f4cad"/>
   </p:notesMasterIdLst>
   <p:sldIdLst>
-    <p:sldId xmlns:r="http://schemas.openxmlformats.org/officeDocument/2006/relationships" id="256" r:id="R52fce3cf2d174a7f"/>
-    <p:sldId xmlns:r="http://schemas.openxmlformats.org/officeDocument/2006/relationships" id="257" r:id="Rcda9d384ce24435c"/>
-    <p:sldId xmlns:r="http://schemas.openxmlformats.org/officeDocument/2006/relationships" id="258" r:id="R7fb2742a5fb24fb8"/>
-    <p:sldId xmlns:r="http://schemas.openxmlformats.org/officeDocument/2006/relationships" id="259" r:id="R5e6c3d657f894ac6"/>
-    <p:sldId xmlns:r="http://schemas.openxmlformats.org/officeDocument/2006/relationships" id="260" r:id="R288874b2fada4db2"/>
-    <p:sldId xmlns:r="http://schemas.openxmlformats.org/officeDocument/2006/relationships" id="261" r:id="R4874b76f34b14fb4"/>
-    <p:sldId xmlns:r="http://schemas.openxmlformats.org/officeDocument/2006/relationships" id="262" r:id="R905a526a2e374d24"/>
-    <p:sldId xmlns:r="http://schemas.openxmlformats.org/officeDocument/2006/relationships" id="263" r:id="Rc9f63d4ee3b84af9"/>
-    <p:sldId xmlns:r="http://schemas.openxmlformats.org/officeDocument/2006/relationships" id="264" r:id="R125db858976946d8"/>
+    <p:sldId xmlns:r="http://schemas.openxmlformats.org/officeDocument/2006/relationships" id="256" r:id="R9d3a1d7211374e3e"/>
+    <p:sldId xmlns:r="http://schemas.openxmlformats.org/officeDocument/2006/relationships" id="257" r:id="Re6f8a4fdd66a465e"/>
+    <p:sldId xmlns:r="http://schemas.openxmlformats.org/officeDocument/2006/relationships" id="258" r:id="R1ac780e5184d47a6"/>
+    <p:sldId xmlns:r="http://schemas.openxmlformats.org/officeDocument/2006/relationships" id="259" r:id="Ra6290d068d8c4ee7"/>
+    <p:sldId xmlns:r="http://schemas.openxmlformats.org/officeDocument/2006/relationships" id="260" r:id="R3c03e2412adf4fdd"/>
+    <p:sldId xmlns:r="http://schemas.openxmlformats.org/officeDocument/2006/relationships" id="261" r:id="Rfb4506aca16143d6"/>
+    <p:sldId xmlns:r="http://schemas.openxmlformats.org/officeDocument/2006/relationships" id="262" r:id="Rf3b8694e4d944e00"/>
+    <p:sldId xmlns:r="http://schemas.openxmlformats.org/officeDocument/2006/relationships" id="263" r:id="Ra9ded1b082de4601"/>
+    <p:sldId xmlns:r="http://schemas.openxmlformats.org/officeDocument/2006/relationships" id="264" r:id="Rbb49fb7458df4f68"/>
   </p:sldIdLst>
   <p:sldSz cx="12192000" cy="6858000"/>
   <p:notesSz cx="6858000" cy="9144000"/>
   <p:embeddedFontLst>
     <p:embeddedFont>
       <p:font typeface="JetBrains Mono"/>
-      <p:regular xmlns:r="http://schemas.openxmlformats.org/officeDocument/2006/relationships" r:id="R8c18f4c2ff64499b"/>
+      <p:regular xmlns:r="http://schemas.openxmlformats.org/officeDocument/2006/relationships" r:id="Re9c97f10012c411e"/>
     </p:embeddedFont>
   </p:embeddedFontLst>
 </p:presentation>
@@ -1071,7 +1071,7 @@
           <p:nvPr/>
         </p:nvPicPr>
         <p:blipFill rotWithShape="1">
-          <a:blip xmlns:r="http://schemas.openxmlformats.org/officeDocument/2006/relationships" xmlns:a="http://schemas.openxmlformats.org/drawingml/2006/main" r:embed="Rc4b2403ac12f41b0"/>
+          <a:blip xmlns:r="http://schemas.openxmlformats.org/officeDocument/2006/relationships" xmlns:a="http://schemas.openxmlformats.org/drawingml/2006/main" r:embed="Rb319130a807843be"/>
           <a:stretch xmlns:a="http://schemas.openxmlformats.org/drawingml/2006/main"/>
         </p:blipFill>
         <p:spPr>
@@ -1451,7 +1451,7 @@
           <p:nvPr/>
         </p:nvPicPr>
         <p:blipFill rotWithShape="1">
-          <a:blip xmlns:r="http://schemas.openxmlformats.org/officeDocument/2006/relationships" xmlns:a="http://schemas.openxmlformats.org/drawingml/2006/main" r:embed="Rf6eb63c7b35e4c2d">
+          <a:blip xmlns:r="http://schemas.openxmlformats.org/officeDocument/2006/relationships" xmlns:a="http://schemas.openxmlformats.org/drawingml/2006/main" r:embed="R0a3d9650023e4aba">
             <a:alphaModFix amt="28000"/>
           </a:blip>
           <a:stretch xmlns:a="http://schemas.openxmlformats.org/drawingml/2006/main"/>
@@ -1664,7 +1664,7 @@
           <p:nvPr/>
         </p:nvPicPr>
         <p:blipFill rotWithShape="1">
-          <a:blip xmlns:r="http://schemas.openxmlformats.org/officeDocument/2006/relationships" xmlns:a="http://schemas.openxmlformats.org/drawingml/2006/main" r:embed="R6612dfa44ade4c91">
+          <a:blip xmlns:r="http://schemas.openxmlformats.org/officeDocument/2006/relationships" xmlns:a="http://schemas.openxmlformats.org/drawingml/2006/main" r:embed="R70698c8c50574e90">
             <a:alphaModFix amt="28000"/>
           </a:blip>
           <a:stretch xmlns:a="http://schemas.openxmlformats.org/drawingml/2006/main"/>
@@ -1899,7 +1899,7 @@
           <p:nvPr/>
         </p:nvPicPr>
         <p:blipFill rotWithShape="1">
-          <a:blip xmlns:r="http://schemas.openxmlformats.org/officeDocument/2006/relationships" xmlns:a="http://schemas.openxmlformats.org/drawingml/2006/main" r:embed="R6786f045f45c49ff">
+          <a:blip xmlns:r="http://schemas.openxmlformats.org/officeDocument/2006/relationships" xmlns:a="http://schemas.openxmlformats.org/drawingml/2006/main" r:embed="R533a4b65af4c45d9">
             <a:alphaModFix amt="28000"/>
           </a:blip>
           <a:stretch xmlns:a="http://schemas.openxmlformats.org/drawingml/2006/main"/>
@@ -2176,7 +2176,7 @@
           <p:nvPr/>
         </p:nvPicPr>
         <p:blipFill rotWithShape="1">
-          <a:blip xmlns:r="http://schemas.openxmlformats.org/officeDocument/2006/relationships" xmlns:a="http://schemas.openxmlformats.org/drawingml/2006/main" r:embed="Rfad7640841f14175">
+          <a:blip xmlns:r="http://schemas.openxmlformats.org/officeDocument/2006/relationships" xmlns:a="http://schemas.openxmlformats.org/drawingml/2006/main" r:embed="R06d091597eb24a50">
             <a:alphaModFix amt="28000"/>
           </a:blip>
           <a:stretch xmlns:a="http://schemas.openxmlformats.org/drawingml/2006/main"/>
@@ -2451,7 +2451,7 @@
           <p:nvPr/>
         </p:nvPicPr>
         <p:blipFill rotWithShape="1">
-          <a:blip xmlns:r="http://schemas.openxmlformats.org/officeDocument/2006/relationships" xmlns:a="http://schemas.openxmlformats.org/drawingml/2006/main" r:embed="Rd775993e3db54c83">
+          <a:blip xmlns:r="http://schemas.openxmlformats.org/officeDocument/2006/relationships" xmlns:a="http://schemas.openxmlformats.org/drawingml/2006/main" r:embed="R5167cae5f1704e56">
             <a:alphaModFix amt="28000"/>
           </a:blip>
           <a:stretch xmlns:a="http://schemas.openxmlformats.org/drawingml/2006/main"/>
@@ -2875,7 +2875,7 @@
           <p:nvPr/>
         </p:nvPicPr>
         <p:blipFill rotWithShape="1">
-          <a:blip xmlns:r="http://schemas.openxmlformats.org/officeDocument/2006/relationships" xmlns:a="http://schemas.openxmlformats.org/drawingml/2006/main" r:embed="R5a89db6a43ce4ea0">
+          <a:blip xmlns:r="http://schemas.openxmlformats.org/officeDocument/2006/relationships" xmlns:a="http://schemas.openxmlformats.org/drawingml/2006/main" r:embed="Rfe23bab9abe34c4c">
             <a:alphaModFix amt="28000"/>
           </a:blip>
           <a:stretch xmlns:a="http://schemas.openxmlformats.org/drawingml/2006/main"/>
@@ -3016,7 +3016,7 @@
           <p:nvPr/>
         </p:nvPicPr>
         <p:blipFill rotWithShape="1">
-          <a:blip xmlns:r="http://schemas.openxmlformats.org/officeDocument/2006/relationships" xmlns:a="http://schemas.openxmlformats.org/drawingml/2006/main" r:embed="Ra964658a07fb47ee">
+          <a:blip xmlns:r="http://schemas.openxmlformats.org/officeDocument/2006/relationships" xmlns:a="http://schemas.openxmlformats.org/drawingml/2006/main" r:embed="R909cbabc24524028">
             <a:alphaModFix amt="28000"/>
           </a:blip>
           <a:stretch xmlns:a="http://schemas.openxmlformats.org/drawingml/2006/main"/>
@@ -3130,7 +3130,7 @@
           <p:nvPr/>
         </p:nvPicPr>
         <p:blipFill rotWithShape="1">
-          <a:blip xmlns:r="http://schemas.openxmlformats.org/officeDocument/2006/relationships" xmlns:a="http://schemas.openxmlformats.org/drawingml/2006/main" r:embed="Rea0cd0123d044b19">
+          <a:blip xmlns:r="http://schemas.openxmlformats.org/officeDocument/2006/relationships" xmlns:a="http://schemas.openxmlformats.org/drawingml/2006/main" r:embed="R8945ef5dd4804efc">
             <a:alphaModFix amt="28000"/>
           </a:blip>
           <a:stretch xmlns:a="http://schemas.openxmlformats.org/drawingml/2006/main"/>
@@ -3457,7 +3457,7 @@
           <p:nvPr/>
         </p:nvPicPr>
         <p:blipFill rotWithShape="1">
-          <a:blip xmlns:r="http://schemas.openxmlformats.org/officeDocument/2006/relationships" xmlns:a="http://schemas.openxmlformats.org/drawingml/2006/main" r:embed="R46eec6739fab40f3">
+          <a:blip xmlns:r="http://schemas.openxmlformats.org/officeDocument/2006/relationships" xmlns:a="http://schemas.openxmlformats.org/drawingml/2006/main" r:embed="R2b969482b22d492c">
             <a:alphaModFix amt="28000"/>
           </a:blip>
           <a:stretch xmlns:a="http://schemas.openxmlformats.org/drawingml/2006/main"/>
@@ -3745,7 +3745,7 @@
           <p:nvPr/>
         </p:nvPicPr>
         <p:blipFill rotWithShape="1">
-          <a:blip xmlns:r="http://schemas.openxmlformats.org/officeDocument/2006/relationships" xmlns:a="http://schemas.openxmlformats.org/drawingml/2006/main" r:embed="R5a6f2374bc5143c0">
+          <a:blip xmlns:r="http://schemas.openxmlformats.org/officeDocument/2006/relationships" xmlns:a="http://schemas.openxmlformats.org/drawingml/2006/main" r:embed="R16e49e09a9b14e40">
             <a:alphaModFix amt="28000"/>
           </a:blip>
           <a:stretch xmlns:a="http://schemas.openxmlformats.org/drawingml/2006/main"/>
@@ -3982,17 +3982,17 @@
   </p:cSld>
   <p:clrMap bg1="lt1" tx1="dk1" bg2="lt2" tx2="dk2" accent1="accent1" accent2="accent2" accent3="accent3" accent4="accent4" accent5="accent5" accent6="accent6" hlink="hlink" folHlink="folHlink"/>
   <p:sldLayoutIdLst>
-    <p:sldLayoutId xmlns:r="http://schemas.openxmlformats.org/officeDocument/2006/relationships" id="2147483649" r:id="R5f12e647d5084778"/>
-    <p:sldLayoutId xmlns:r="http://schemas.openxmlformats.org/officeDocument/2006/relationships" id="2147483650" r:id="R14b9a990f9694814"/>
-    <p:sldLayoutId xmlns:r="http://schemas.openxmlformats.org/officeDocument/2006/relationships" id="2147483651" r:id="Ra9f8fbe1839b4b4c"/>
-    <p:sldLayoutId xmlns:r="http://schemas.openxmlformats.org/officeDocument/2006/relationships" id="2147483652" r:id="Rd90477b8513c4047"/>
-    <p:sldLayoutId xmlns:r="http://schemas.openxmlformats.org/officeDocument/2006/relationships" id="2147483653" r:id="R3b6e91d11b3a4bf3"/>
-    <p:sldLayoutId xmlns:r="http://schemas.openxmlformats.org/officeDocument/2006/relationships" id="2147483654" r:id="R00c0803ebd8e425d"/>
-    <p:sldLayoutId xmlns:r="http://schemas.openxmlformats.org/officeDocument/2006/relationships" id="2147483655" r:id="R49b6d88ab1ca43ba"/>
-    <p:sldLayoutId xmlns:r="http://schemas.openxmlformats.org/officeDocument/2006/relationships" id="2147483656" r:id="Rf673eafcf94841c4"/>
-    <p:sldLayoutId xmlns:r="http://schemas.openxmlformats.org/officeDocument/2006/relationships" id="2147483657" r:id="Re64f01a291ce4e96"/>
-    <p:sldLayoutId xmlns:r="http://schemas.openxmlformats.org/officeDocument/2006/relationships" id="2147483658" r:id="R0662efe75b0a4099"/>
-    <p:sldLayoutId xmlns:r="http://schemas.openxmlformats.org/officeDocument/2006/relationships" id="2147483659" r:id="R83d4bd07ad2944e2"/>
+    <p:sldLayoutId xmlns:r="http://schemas.openxmlformats.org/officeDocument/2006/relationships" id="2147483649" r:id="Ra86a1d1043544900"/>
+    <p:sldLayoutId xmlns:r="http://schemas.openxmlformats.org/officeDocument/2006/relationships" id="2147483650" r:id="Rbdba0be83da84702"/>
+    <p:sldLayoutId xmlns:r="http://schemas.openxmlformats.org/officeDocument/2006/relationships" id="2147483651" r:id="R89233031b4ea4aaa"/>
+    <p:sldLayoutId xmlns:r="http://schemas.openxmlformats.org/officeDocument/2006/relationships" id="2147483652" r:id="Rb17fd0cd49f74bde"/>
+    <p:sldLayoutId xmlns:r="http://schemas.openxmlformats.org/officeDocument/2006/relationships" id="2147483653" r:id="Rea2abe9415474a45"/>
+    <p:sldLayoutId xmlns:r="http://schemas.openxmlformats.org/officeDocument/2006/relationships" id="2147483654" r:id="R4489b887e11647b4"/>
+    <p:sldLayoutId xmlns:r="http://schemas.openxmlformats.org/officeDocument/2006/relationships" id="2147483655" r:id="R0cfe1f3231a24769"/>
+    <p:sldLayoutId xmlns:r="http://schemas.openxmlformats.org/officeDocument/2006/relationships" id="2147483656" r:id="Rcccc749b7c834d54"/>
+    <p:sldLayoutId xmlns:r="http://schemas.openxmlformats.org/officeDocument/2006/relationships" id="2147483657" r:id="Rf4fc30343b794b72"/>
+    <p:sldLayoutId xmlns:r="http://schemas.openxmlformats.org/officeDocument/2006/relationships" id="2147483658" r:id="R370c4b64e3a54c30"/>
+    <p:sldLayoutId xmlns:r="http://schemas.openxmlformats.org/officeDocument/2006/relationships" id="2147483659" r:id="R2308c54dffe5464f"/>
   </p:sldLayoutIdLst>
   <p:hf hdr="0" ftr="0" dt="0"/>
   <p:txStyles>

--- a/Mapped Curriculum Lessons/Grade 7/Lesson 12 - Strings and Text/Strings and Text - Slides.pptx
+++ b/Mapped Curriculum Lessons/Grade 7/Lesson 12 - Strings and Text/Strings and Text - Slides.pptx
@@ -2,28 +2,28 @@
 <file path=ppt/presentation.xml><?xml version="1.0" encoding="utf-8"?>
 <p:presentation xmlns:p="http://schemas.openxmlformats.org/presentationml/2006/main" embedTrueTypeFonts="1" saveSubsetFonts="0">
   <p:sldMasterIdLst>
-    <p:sldMasterId xmlns:r="http://schemas.openxmlformats.org/officeDocument/2006/relationships" id="2147483648" r:id="Rd761cbff25114396"/>
+    <p:sldMasterId xmlns:r="http://schemas.openxmlformats.org/officeDocument/2006/relationships" id="2147483648" r:id="Rfed15690120c42c2"/>
   </p:sldMasterIdLst>
   <p:notesMasterIdLst>
-    <p:notesMasterId xmlns:r="http://schemas.openxmlformats.org/officeDocument/2006/relationships" r:id="R3716b3ad417f4cad"/>
+    <p:notesMasterId xmlns:r="http://schemas.openxmlformats.org/officeDocument/2006/relationships" r:id="Rf34f7c3e0edf4172"/>
   </p:notesMasterIdLst>
   <p:sldIdLst>
-    <p:sldId xmlns:r="http://schemas.openxmlformats.org/officeDocument/2006/relationships" id="256" r:id="R9d3a1d7211374e3e"/>
-    <p:sldId xmlns:r="http://schemas.openxmlformats.org/officeDocument/2006/relationships" id="257" r:id="Re6f8a4fdd66a465e"/>
-    <p:sldId xmlns:r="http://schemas.openxmlformats.org/officeDocument/2006/relationships" id="258" r:id="R1ac780e5184d47a6"/>
-    <p:sldId xmlns:r="http://schemas.openxmlformats.org/officeDocument/2006/relationships" id="259" r:id="Ra6290d068d8c4ee7"/>
-    <p:sldId xmlns:r="http://schemas.openxmlformats.org/officeDocument/2006/relationships" id="260" r:id="R3c03e2412adf4fdd"/>
-    <p:sldId xmlns:r="http://schemas.openxmlformats.org/officeDocument/2006/relationships" id="261" r:id="Rfb4506aca16143d6"/>
-    <p:sldId xmlns:r="http://schemas.openxmlformats.org/officeDocument/2006/relationships" id="262" r:id="Rf3b8694e4d944e00"/>
-    <p:sldId xmlns:r="http://schemas.openxmlformats.org/officeDocument/2006/relationships" id="263" r:id="Ra9ded1b082de4601"/>
-    <p:sldId xmlns:r="http://schemas.openxmlformats.org/officeDocument/2006/relationships" id="264" r:id="Rbb49fb7458df4f68"/>
+    <p:sldId xmlns:r="http://schemas.openxmlformats.org/officeDocument/2006/relationships" id="256" r:id="R7e0a3593d9654bcd"/>
+    <p:sldId xmlns:r="http://schemas.openxmlformats.org/officeDocument/2006/relationships" id="257" r:id="R063c08d339b44e64"/>
+    <p:sldId xmlns:r="http://schemas.openxmlformats.org/officeDocument/2006/relationships" id="258" r:id="Rc380ecfcd53b4ae2"/>
+    <p:sldId xmlns:r="http://schemas.openxmlformats.org/officeDocument/2006/relationships" id="259" r:id="R719a9bde63454bd8"/>
+    <p:sldId xmlns:r="http://schemas.openxmlformats.org/officeDocument/2006/relationships" id="260" r:id="R4e8ef2fdf3054066"/>
+    <p:sldId xmlns:r="http://schemas.openxmlformats.org/officeDocument/2006/relationships" id="261" r:id="Rba6def6e384841dc"/>
+    <p:sldId xmlns:r="http://schemas.openxmlformats.org/officeDocument/2006/relationships" id="262" r:id="Re681d4e0a5594a77"/>
+    <p:sldId xmlns:r="http://schemas.openxmlformats.org/officeDocument/2006/relationships" id="263" r:id="R39fffe5b9b7546e5"/>
+    <p:sldId xmlns:r="http://schemas.openxmlformats.org/officeDocument/2006/relationships" id="264" r:id="R44efd116c8ad4290"/>
   </p:sldIdLst>
   <p:sldSz cx="12192000" cy="6858000"/>
   <p:notesSz cx="6858000" cy="9144000"/>
   <p:embeddedFontLst>
     <p:embeddedFont>
       <p:font typeface="JetBrains Mono"/>
-      <p:regular xmlns:r="http://schemas.openxmlformats.org/officeDocument/2006/relationships" r:id="Re9c97f10012c411e"/>
+      <p:regular xmlns:r="http://schemas.openxmlformats.org/officeDocument/2006/relationships" r:id="Rf7bcab41c3fd4555"/>
     </p:embeddedFont>
   </p:embeddedFontLst>
 </p:presentation>
@@ -1071,7 +1071,7 @@
           <p:nvPr/>
         </p:nvPicPr>
         <p:blipFill rotWithShape="1">
-          <a:blip xmlns:r="http://schemas.openxmlformats.org/officeDocument/2006/relationships" xmlns:a="http://schemas.openxmlformats.org/drawingml/2006/main" r:embed="Rb319130a807843be"/>
+          <a:blip xmlns:r="http://schemas.openxmlformats.org/officeDocument/2006/relationships" xmlns:a="http://schemas.openxmlformats.org/drawingml/2006/main" r:embed="Rdbb8468cd2734e6f"/>
           <a:stretch xmlns:a="http://schemas.openxmlformats.org/drawingml/2006/main"/>
         </p:blipFill>
         <p:spPr>
@@ -1451,7 +1451,7 @@
           <p:nvPr/>
         </p:nvPicPr>
         <p:blipFill rotWithShape="1">
-          <a:blip xmlns:r="http://schemas.openxmlformats.org/officeDocument/2006/relationships" xmlns:a="http://schemas.openxmlformats.org/drawingml/2006/main" r:embed="R0a3d9650023e4aba">
+          <a:blip xmlns:r="http://schemas.openxmlformats.org/officeDocument/2006/relationships" xmlns:a="http://schemas.openxmlformats.org/drawingml/2006/main" r:embed="R8deb0e5bde61405b">
             <a:alphaModFix amt="28000"/>
           </a:blip>
           <a:stretch xmlns:a="http://schemas.openxmlformats.org/drawingml/2006/main"/>
@@ -1664,7 +1664,7 @@
           <p:nvPr/>
         </p:nvPicPr>
         <p:blipFill rotWithShape="1">
-          <a:blip xmlns:r="http://schemas.openxmlformats.org/officeDocument/2006/relationships" xmlns:a="http://schemas.openxmlformats.org/drawingml/2006/main" r:embed="R70698c8c50574e90">
+          <a:blip xmlns:r="http://schemas.openxmlformats.org/officeDocument/2006/relationships" xmlns:a="http://schemas.openxmlformats.org/drawingml/2006/main" r:embed="R2b9ec1dff7ea4152">
             <a:alphaModFix amt="28000"/>
           </a:blip>
           <a:stretch xmlns:a="http://schemas.openxmlformats.org/drawingml/2006/main"/>
@@ -1899,7 +1899,7 @@
           <p:nvPr/>
         </p:nvPicPr>
         <p:blipFill rotWithShape="1">
-          <a:blip xmlns:r="http://schemas.openxmlformats.org/officeDocument/2006/relationships" xmlns:a="http://schemas.openxmlformats.org/drawingml/2006/main" r:embed="R533a4b65af4c45d9">
+          <a:blip xmlns:r="http://schemas.openxmlformats.org/officeDocument/2006/relationships" xmlns:a="http://schemas.openxmlformats.org/drawingml/2006/main" r:embed="Rf888c3687f854e7d">
             <a:alphaModFix amt="28000"/>
           </a:blip>
           <a:stretch xmlns:a="http://schemas.openxmlformats.org/drawingml/2006/main"/>
@@ -2176,7 +2176,7 @@
           <p:nvPr/>
         </p:nvPicPr>
         <p:blipFill rotWithShape="1">
-          <a:blip xmlns:r="http://schemas.openxmlformats.org/officeDocument/2006/relationships" xmlns:a="http://schemas.openxmlformats.org/drawingml/2006/main" r:embed="R06d091597eb24a50">
+          <a:blip xmlns:r="http://schemas.openxmlformats.org/officeDocument/2006/relationships" xmlns:a="http://schemas.openxmlformats.org/drawingml/2006/main" r:embed="Rce7d8ca314ce402e">
             <a:alphaModFix amt="28000"/>
           </a:blip>
           <a:stretch xmlns:a="http://schemas.openxmlformats.org/drawingml/2006/main"/>
@@ -2451,7 +2451,7 @@
           <p:nvPr/>
         </p:nvPicPr>
         <p:blipFill rotWithShape="1">
-          <a:blip xmlns:r="http://schemas.openxmlformats.org/officeDocument/2006/relationships" xmlns:a="http://schemas.openxmlformats.org/drawingml/2006/main" r:embed="R5167cae5f1704e56">
+          <a:blip xmlns:r="http://schemas.openxmlformats.org/officeDocument/2006/relationships" xmlns:a="http://schemas.openxmlformats.org/drawingml/2006/main" r:embed="R766438dfdca34fff">
             <a:alphaModFix amt="28000"/>
           </a:blip>
           <a:stretch xmlns:a="http://schemas.openxmlformats.org/drawingml/2006/main"/>
@@ -2875,7 +2875,7 @@
           <p:nvPr/>
         </p:nvPicPr>
         <p:blipFill rotWithShape="1">
-          <a:blip xmlns:r="http://schemas.openxmlformats.org/officeDocument/2006/relationships" xmlns:a="http://schemas.openxmlformats.org/drawingml/2006/main" r:embed="Rfe23bab9abe34c4c">
+          <a:blip xmlns:r="http://schemas.openxmlformats.org/officeDocument/2006/relationships" xmlns:a="http://schemas.openxmlformats.org/drawingml/2006/main" r:embed="R986ed910ac5d40b6">
             <a:alphaModFix amt="28000"/>
           </a:blip>
           <a:stretch xmlns:a="http://schemas.openxmlformats.org/drawingml/2006/main"/>
@@ -3016,7 +3016,7 @@
           <p:nvPr/>
         </p:nvPicPr>
         <p:blipFill rotWithShape="1">
-          <a:blip xmlns:r="http://schemas.openxmlformats.org/officeDocument/2006/relationships" xmlns:a="http://schemas.openxmlformats.org/drawingml/2006/main" r:embed="R909cbabc24524028">
+          <a:blip xmlns:r="http://schemas.openxmlformats.org/officeDocument/2006/relationships" xmlns:a="http://schemas.openxmlformats.org/drawingml/2006/main" r:embed="R75822392b4374640">
             <a:alphaModFix amt="28000"/>
           </a:blip>
           <a:stretch xmlns:a="http://schemas.openxmlformats.org/drawingml/2006/main"/>
@@ -3130,7 +3130,7 @@
           <p:nvPr/>
         </p:nvPicPr>
         <p:blipFill rotWithShape="1">
-          <a:blip xmlns:r="http://schemas.openxmlformats.org/officeDocument/2006/relationships" xmlns:a="http://schemas.openxmlformats.org/drawingml/2006/main" r:embed="R8945ef5dd4804efc">
+          <a:blip xmlns:r="http://schemas.openxmlformats.org/officeDocument/2006/relationships" xmlns:a="http://schemas.openxmlformats.org/drawingml/2006/main" r:embed="Rcc8abe87ae8340c0">
             <a:alphaModFix amt="28000"/>
           </a:blip>
           <a:stretch xmlns:a="http://schemas.openxmlformats.org/drawingml/2006/main"/>
@@ -3457,7 +3457,7 @@
           <p:nvPr/>
         </p:nvPicPr>
         <p:blipFill rotWithShape="1">
-          <a:blip xmlns:r="http://schemas.openxmlformats.org/officeDocument/2006/relationships" xmlns:a="http://schemas.openxmlformats.org/drawingml/2006/main" r:embed="R2b969482b22d492c">
+          <a:blip xmlns:r="http://schemas.openxmlformats.org/officeDocument/2006/relationships" xmlns:a="http://schemas.openxmlformats.org/drawingml/2006/main" r:embed="R76321a432c9444bd">
             <a:alphaModFix amt="28000"/>
           </a:blip>
           <a:stretch xmlns:a="http://schemas.openxmlformats.org/drawingml/2006/main"/>
@@ -3745,7 +3745,7 @@
           <p:nvPr/>
         </p:nvPicPr>
         <p:blipFill rotWithShape="1">
-          <a:blip xmlns:r="http://schemas.openxmlformats.org/officeDocument/2006/relationships" xmlns:a="http://schemas.openxmlformats.org/drawingml/2006/main" r:embed="R16e49e09a9b14e40">
+          <a:blip xmlns:r="http://schemas.openxmlformats.org/officeDocument/2006/relationships" xmlns:a="http://schemas.openxmlformats.org/drawingml/2006/main" r:embed="R427b1a9d00b743e9">
             <a:alphaModFix amt="28000"/>
           </a:blip>
           <a:stretch xmlns:a="http://schemas.openxmlformats.org/drawingml/2006/main"/>
@@ -3982,17 +3982,17 @@
   </p:cSld>
   <p:clrMap bg1="lt1" tx1="dk1" bg2="lt2" tx2="dk2" accent1="accent1" accent2="accent2" accent3="accent3" accent4="accent4" accent5="accent5" accent6="accent6" hlink="hlink" folHlink="folHlink"/>
   <p:sldLayoutIdLst>
-    <p:sldLayoutId xmlns:r="http://schemas.openxmlformats.org/officeDocument/2006/relationships" id="2147483649" r:id="Ra86a1d1043544900"/>
-    <p:sldLayoutId xmlns:r="http://schemas.openxmlformats.org/officeDocument/2006/relationships" id="2147483650" r:id="Rbdba0be83da84702"/>
-    <p:sldLayoutId xmlns:r="http://schemas.openxmlformats.org/officeDocument/2006/relationships" id="2147483651" r:id="R89233031b4ea4aaa"/>
-    <p:sldLayoutId xmlns:r="http://schemas.openxmlformats.org/officeDocument/2006/relationships" id="2147483652" r:id="Rb17fd0cd49f74bde"/>
-    <p:sldLayoutId xmlns:r="http://schemas.openxmlformats.org/officeDocument/2006/relationships" id="2147483653" r:id="Rea2abe9415474a45"/>
-    <p:sldLayoutId xmlns:r="http://schemas.openxmlformats.org/officeDocument/2006/relationships" id="2147483654" r:id="R4489b887e11647b4"/>
-    <p:sldLayoutId xmlns:r="http://schemas.openxmlformats.org/officeDocument/2006/relationships" id="2147483655" r:id="R0cfe1f3231a24769"/>
-    <p:sldLayoutId xmlns:r="http://schemas.openxmlformats.org/officeDocument/2006/relationships" id="2147483656" r:id="Rcccc749b7c834d54"/>
-    <p:sldLayoutId xmlns:r="http://schemas.openxmlformats.org/officeDocument/2006/relationships" id="2147483657" r:id="Rf4fc30343b794b72"/>
-    <p:sldLayoutId xmlns:r="http://schemas.openxmlformats.org/officeDocument/2006/relationships" id="2147483658" r:id="R370c4b64e3a54c30"/>
-    <p:sldLayoutId xmlns:r="http://schemas.openxmlformats.org/officeDocument/2006/relationships" id="2147483659" r:id="R2308c54dffe5464f"/>
+    <p:sldLayoutId xmlns:r="http://schemas.openxmlformats.org/officeDocument/2006/relationships" id="2147483649" r:id="Rafb17b204eff4b26"/>
+    <p:sldLayoutId xmlns:r="http://schemas.openxmlformats.org/officeDocument/2006/relationships" id="2147483650" r:id="Rea4adf4385c7437d"/>
+    <p:sldLayoutId xmlns:r="http://schemas.openxmlformats.org/officeDocument/2006/relationships" id="2147483651" r:id="Rca1a697d43794515"/>
+    <p:sldLayoutId xmlns:r="http://schemas.openxmlformats.org/officeDocument/2006/relationships" id="2147483652" r:id="R62627f61e3dd402c"/>
+    <p:sldLayoutId xmlns:r="http://schemas.openxmlformats.org/officeDocument/2006/relationships" id="2147483653" r:id="R110eb0f35c834007"/>
+    <p:sldLayoutId xmlns:r="http://schemas.openxmlformats.org/officeDocument/2006/relationships" id="2147483654" r:id="R115e734a683644c8"/>
+    <p:sldLayoutId xmlns:r="http://schemas.openxmlformats.org/officeDocument/2006/relationships" id="2147483655" r:id="R11ee51f30b12431a"/>
+    <p:sldLayoutId xmlns:r="http://schemas.openxmlformats.org/officeDocument/2006/relationships" id="2147483656" r:id="Rc30fdef3df3e42f7"/>
+    <p:sldLayoutId xmlns:r="http://schemas.openxmlformats.org/officeDocument/2006/relationships" id="2147483657" r:id="R8f6efd8c186647b3"/>
+    <p:sldLayoutId xmlns:r="http://schemas.openxmlformats.org/officeDocument/2006/relationships" id="2147483658" r:id="R3ca00940b6f44b75"/>
+    <p:sldLayoutId xmlns:r="http://schemas.openxmlformats.org/officeDocument/2006/relationships" id="2147483659" r:id="R977b01393aab4918"/>
   </p:sldLayoutIdLst>
   <p:hf hdr="0" ftr="0" dt="0"/>
   <p:txStyles>

--- a/Mapped Curriculum Lessons/Grade 7/Lesson 12 - Strings and Text/Strings and Text - Slides.pptx
+++ b/Mapped Curriculum Lessons/Grade 7/Lesson 12 - Strings and Text/Strings and Text - Slides.pptx
@@ -2,28 +2,28 @@
 <file path=ppt/presentation.xml><?xml version="1.0" encoding="utf-8"?>
 <p:presentation xmlns:p="http://schemas.openxmlformats.org/presentationml/2006/main" embedTrueTypeFonts="1" saveSubsetFonts="0">
   <p:sldMasterIdLst>
-    <p:sldMasterId xmlns:r="http://schemas.openxmlformats.org/officeDocument/2006/relationships" id="2147483648" r:id="Rfed15690120c42c2"/>
+    <p:sldMasterId xmlns:r="http://schemas.openxmlformats.org/officeDocument/2006/relationships" id="2147483648" r:id="Rd3611887e4c64323"/>
   </p:sldMasterIdLst>
   <p:notesMasterIdLst>
-    <p:notesMasterId xmlns:r="http://schemas.openxmlformats.org/officeDocument/2006/relationships" r:id="Rf34f7c3e0edf4172"/>
+    <p:notesMasterId xmlns:r="http://schemas.openxmlformats.org/officeDocument/2006/relationships" r:id="R6cb36e70164a42f7"/>
   </p:notesMasterIdLst>
   <p:sldIdLst>
-    <p:sldId xmlns:r="http://schemas.openxmlformats.org/officeDocument/2006/relationships" id="256" r:id="R7e0a3593d9654bcd"/>
-    <p:sldId xmlns:r="http://schemas.openxmlformats.org/officeDocument/2006/relationships" id="257" r:id="R063c08d339b44e64"/>
-    <p:sldId xmlns:r="http://schemas.openxmlformats.org/officeDocument/2006/relationships" id="258" r:id="Rc380ecfcd53b4ae2"/>
-    <p:sldId xmlns:r="http://schemas.openxmlformats.org/officeDocument/2006/relationships" id="259" r:id="R719a9bde63454bd8"/>
-    <p:sldId xmlns:r="http://schemas.openxmlformats.org/officeDocument/2006/relationships" id="260" r:id="R4e8ef2fdf3054066"/>
-    <p:sldId xmlns:r="http://schemas.openxmlformats.org/officeDocument/2006/relationships" id="261" r:id="Rba6def6e384841dc"/>
-    <p:sldId xmlns:r="http://schemas.openxmlformats.org/officeDocument/2006/relationships" id="262" r:id="Re681d4e0a5594a77"/>
-    <p:sldId xmlns:r="http://schemas.openxmlformats.org/officeDocument/2006/relationships" id="263" r:id="R39fffe5b9b7546e5"/>
-    <p:sldId xmlns:r="http://schemas.openxmlformats.org/officeDocument/2006/relationships" id="264" r:id="R44efd116c8ad4290"/>
+    <p:sldId xmlns:r="http://schemas.openxmlformats.org/officeDocument/2006/relationships" id="256" r:id="R51252ad44070467d"/>
+    <p:sldId xmlns:r="http://schemas.openxmlformats.org/officeDocument/2006/relationships" id="257" r:id="R714e2a341579497b"/>
+    <p:sldId xmlns:r="http://schemas.openxmlformats.org/officeDocument/2006/relationships" id="258" r:id="R4aad7077c15749ab"/>
+    <p:sldId xmlns:r="http://schemas.openxmlformats.org/officeDocument/2006/relationships" id="259" r:id="Rd226c4b6897249f9"/>
+    <p:sldId xmlns:r="http://schemas.openxmlformats.org/officeDocument/2006/relationships" id="260" r:id="R71ccfa77d7de49e1"/>
+    <p:sldId xmlns:r="http://schemas.openxmlformats.org/officeDocument/2006/relationships" id="261" r:id="Ra2930a5440e649d1"/>
+    <p:sldId xmlns:r="http://schemas.openxmlformats.org/officeDocument/2006/relationships" id="262" r:id="R751a4eb21f184771"/>
+    <p:sldId xmlns:r="http://schemas.openxmlformats.org/officeDocument/2006/relationships" id="263" r:id="R717226c2615845c5"/>
+    <p:sldId xmlns:r="http://schemas.openxmlformats.org/officeDocument/2006/relationships" id="264" r:id="Rd06191ccfade40f6"/>
   </p:sldIdLst>
   <p:sldSz cx="12192000" cy="6858000"/>
   <p:notesSz cx="6858000" cy="9144000"/>
   <p:embeddedFontLst>
     <p:embeddedFont>
       <p:font typeface="JetBrains Mono"/>
-      <p:regular xmlns:r="http://schemas.openxmlformats.org/officeDocument/2006/relationships" r:id="Rf7bcab41c3fd4555"/>
+      <p:regular xmlns:r="http://schemas.openxmlformats.org/officeDocument/2006/relationships" r:id="R953172ebdad24dc4"/>
     </p:embeddedFont>
   </p:embeddedFontLst>
 </p:presentation>
@@ -1071,7 +1071,7 @@
           <p:nvPr/>
         </p:nvPicPr>
         <p:blipFill rotWithShape="1">
-          <a:blip xmlns:r="http://schemas.openxmlformats.org/officeDocument/2006/relationships" xmlns:a="http://schemas.openxmlformats.org/drawingml/2006/main" r:embed="Rdbb8468cd2734e6f"/>
+          <a:blip xmlns:r="http://schemas.openxmlformats.org/officeDocument/2006/relationships" xmlns:a="http://schemas.openxmlformats.org/drawingml/2006/main" r:embed="R34ecff9c83ed4f5a"/>
           <a:stretch xmlns:a="http://schemas.openxmlformats.org/drawingml/2006/main"/>
         </p:blipFill>
         <p:spPr>
@@ -1451,7 +1451,7 @@
           <p:nvPr/>
         </p:nvPicPr>
         <p:blipFill rotWithShape="1">
-          <a:blip xmlns:r="http://schemas.openxmlformats.org/officeDocument/2006/relationships" xmlns:a="http://schemas.openxmlformats.org/drawingml/2006/main" r:embed="R8deb0e5bde61405b">
+          <a:blip xmlns:r="http://schemas.openxmlformats.org/officeDocument/2006/relationships" xmlns:a="http://schemas.openxmlformats.org/drawingml/2006/main" r:embed="R04bd257f93e7434b">
             <a:alphaModFix amt="28000"/>
           </a:blip>
           <a:stretch xmlns:a="http://schemas.openxmlformats.org/drawingml/2006/main"/>
@@ -1664,7 +1664,7 @@
           <p:nvPr/>
         </p:nvPicPr>
         <p:blipFill rotWithShape="1">
-          <a:blip xmlns:r="http://schemas.openxmlformats.org/officeDocument/2006/relationships" xmlns:a="http://schemas.openxmlformats.org/drawingml/2006/main" r:embed="R2b9ec1dff7ea4152">
+          <a:blip xmlns:r="http://schemas.openxmlformats.org/officeDocument/2006/relationships" xmlns:a="http://schemas.openxmlformats.org/drawingml/2006/main" r:embed="Raaabc314f50e48f0">
             <a:alphaModFix amt="28000"/>
           </a:blip>
           <a:stretch xmlns:a="http://schemas.openxmlformats.org/drawingml/2006/main"/>
@@ -1899,7 +1899,7 @@
           <p:nvPr/>
         </p:nvPicPr>
         <p:blipFill rotWithShape="1">
-          <a:blip xmlns:r="http://schemas.openxmlformats.org/officeDocument/2006/relationships" xmlns:a="http://schemas.openxmlformats.org/drawingml/2006/main" r:embed="Rf888c3687f854e7d">
+          <a:blip xmlns:r="http://schemas.openxmlformats.org/officeDocument/2006/relationships" xmlns:a="http://schemas.openxmlformats.org/drawingml/2006/main" r:embed="R433d105690124de9">
             <a:alphaModFix amt="28000"/>
           </a:blip>
           <a:stretch xmlns:a="http://schemas.openxmlformats.org/drawingml/2006/main"/>
@@ -2176,7 +2176,7 @@
           <p:nvPr/>
         </p:nvPicPr>
         <p:blipFill rotWithShape="1">
-          <a:blip xmlns:r="http://schemas.openxmlformats.org/officeDocument/2006/relationships" xmlns:a="http://schemas.openxmlformats.org/drawingml/2006/main" r:embed="Rce7d8ca314ce402e">
+          <a:blip xmlns:r="http://schemas.openxmlformats.org/officeDocument/2006/relationships" xmlns:a="http://schemas.openxmlformats.org/drawingml/2006/main" r:embed="R97f17b7d246640ad">
             <a:alphaModFix amt="28000"/>
           </a:blip>
           <a:stretch xmlns:a="http://schemas.openxmlformats.org/drawingml/2006/main"/>
@@ -2451,7 +2451,7 @@
           <p:nvPr/>
         </p:nvPicPr>
         <p:blipFill rotWithShape="1">
-          <a:blip xmlns:r="http://schemas.openxmlformats.org/officeDocument/2006/relationships" xmlns:a="http://schemas.openxmlformats.org/drawingml/2006/main" r:embed="R766438dfdca34fff">
+          <a:blip xmlns:r="http://schemas.openxmlformats.org/officeDocument/2006/relationships" xmlns:a="http://schemas.openxmlformats.org/drawingml/2006/main" r:embed="R7c8d388fcac84d4a">
             <a:alphaModFix amt="28000"/>
           </a:blip>
           <a:stretch xmlns:a="http://schemas.openxmlformats.org/drawingml/2006/main"/>
@@ -2875,7 +2875,7 @@
           <p:nvPr/>
         </p:nvPicPr>
         <p:blipFill rotWithShape="1">
-          <a:blip xmlns:r="http://schemas.openxmlformats.org/officeDocument/2006/relationships" xmlns:a="http://schemas.openxmlformats.org/drawingml/2006/main" r:embed="R986ed910ac5d40b6">
+          <a:blip xmlns:r="http://schemas.openxmlformats.org/officeDocument/2006/relationships" xmlns:a="http://schemas.openxmlformats.org/drawingml/2006/main" r:embed="R82b85dee95424cee">
             <a:alphaModFix amt="28000"/>
           </a:blip>
           <a:stretch xmlns:a="http://schemas.openxmlformats.org/drawingml/2006/main"/>
@@ -3016,7 +3016,7 @@
           <p:nvPr/>
         </p:nvPicPr>
         <p:blipFill rotWithShape="1">
-          <a:blip xmlns:r="http://schemas.openxmlformats.org/officeDocument/2006/relationships" xmlns:a="http://schemas.openxmlformats.org/drawingml/2006/main" r:embed="R75822392b4374640">
+          <a:blip xmlns:r="http://schemas.openxmlformats.org/officeDocument/2006/relationships" xmlns:a="http://schemas.openxmlformats.org/drawingml/2006/main" r:embed="Rbdd565bace834c15">
             <a:alphaModFix amt="28000"/>
           </a:blip>
           <a:stretch xmlns:a="http://schemas.openxmlformats.org/drawingml/2006/main"/>
@@ -3130,7 +3130,7 @@
           <p:nvPr/>
         </p:nvPicPr>
         <p:blipFill rotWithShape="1">
-          <a:blip xmlns:r="http://schemas.openxmlformats.org/officeDocument/2006/relationships" xmlns:a="http://schemas.openxmlformats.org/drawingml/2006/main" r:embed="Rcc8abe87ae8340c0">
+          <a:blip xmlns:r="http://schemas.openxmlformats.org/officeDocument/2006/relationships" xmlns:a="http://schemas.openxmlformats.org/drawingml/2006/main" r:embed="Rc0ab2e83bd87411e">
             <a:alphaModFix amt="28000"/>
           </a:blip>
           <a:stretch xmlns:a="http://schemas.openxmlformats.org/drawingml/2006/main"/>
@@ -3457,7 +3457,7 @@
           <p:nvPr/>
         </p:nvPicPr>
         <p:blipFill rotWithShape="1">
-          <a:blip xmlns:r="http://schemas.openxmlformats.org/officeDocument/2006/relationships" xmlns:a="http://schemas.openxmlformats.org/drawingml/2006/main" r:embed="R76321a432c9444bd">
+          <a:blip xmlns:r="http://schemas.openxmlformats.org/officeDocument/2006/relationships" xmlns:a="http://schemas.openxmlformats.org/drawingml/2006/main" r:embed="R39bf3a19713b4958">
             <a:alphaModFix amt="28000"/>
           </a:blip>
           <a:stretch xmlns:a="http://schemas.openxmlformats.org/drawingml/2006/main"/>
@@ -3745,7 +3745,7 @@
           <p:nvPr/>
         </p:nvPicPr>
         <p:blipFill rotWithShape="1">
-          <a:blip xmlns:r="http://schemas.openxmlformats.org/officeDocument/2006/relationships" xmlns:a="http://schemas.openxmlformats.org/drawingml/2006/main" r:embed="R427b1a9d00b743e9">
+          <a:blip xmlns:r="http://schemas.openxmlformats.org/officeDocument/2006/relationships" xmlns:a="http://schemas.openxmlformats.org/drawingml/2006/main" r:embed="R8bd487ccde2d4659">
             <a:alphaModFix amt="28000"/>
           </a:blip>
           <a:stretch xmlns:a="http://schemas.openxmlformats.org/drawingml/2006/main"/>
@@ -3982,17 +3982,17 @@
   </p:cSld>
   <p:clrMap bg1="lt1" tx1="dk1" bg2="lt2" tx2="dk2" accent1="accent1" accent2="accent2" accent3="accent3" accent4="accent4" accent5="accent5" accent6="accent6" hlink="hlink" folHlink="folHlink"/>
   <p:sldLayoutIdLst>
-    <p:sldLayoutId xmlns:r="http://schemas.openxmlformats.org/officeDocument/2006/relationships" id="2147483649" r:id="Rafb17b204eff4b26"/>
-    <p:sldLayoutId xmlns:r="http://schemas.openxmlformats.org/officeDocument/2006/relationships" id="2147483650" r:id="Rea4adf4385c7437d"/>
-    <p:sldLayoutId xmlns:r="http://schemas.openxmlformats.org/officeDocument/2006/relationships" id="2147483651" r:id="Rca1a697d43794515"/>
-    <p:sldLayoutId xmlns:r="http://schemas.openxmlformats.org/officeDocument/2006/relationships" id="2147483652" r:id="R62627f61e3dd402c"/>
-    <p:sldLayoutId xmlns:r="http://schemas.openxmlformats.org/officeDocument/2006/relationships" id="2147483653" r:id="R110eb0f35c834007"/>
-    <p:sldLayoutId xmlns:r="http://schemas.openxmlformats.org/officeDocument/2006/relationships" id="2147483654" r:id="R115e734a683644c8"/>
-    <p:sldLayoutId xmlns:r="http://schemas.openxmlformats.org/officeDocument/2006/relationships" id="2147483655" r:id="R11ee51f30b12431a"/>
-    <p:sldLayoutId xmlns:r="http://schemas.openxmlformats.org/officeDocument/2006/relationships" id="2147483656" r:id="Rc30fdef3df3e42f7"/>
-    <p:sldLayoutId xmlns:r="http://schemas.openxmlformats.org/officeDocument/2006/relationships" id="2147483657" r:id="R8f6efd8c186647b3"/>
-    <p:sldLayoutId xmlns:r="http://schemas.openxmlformats.org/officeDocument/2006/relationships" id="2147483658" r:id="R3ca00940b6f44b75"/>
-    <p:sldLayoutId xmlns:r="http://schemas.openxmlformats.org/officeDocument/2006/relationships" id="2147483659" r:id="R977b01393aab4918"/>
+    <p:sldLayoutId xmlns:r="http://schemas.openxmlformats.org/officeDocument/2006/relationships" id="2147483649" r:id="R091ad3f882974da7"/>
+    <p:sldLayoutId xmlns:r="http://schemas.openxmlformats.org/officeDocument/2006/relationships" id="2147483650" r:id="R5b997b89936b44e0"/>
+    <p:sldLayoutId xmlns:r="http://schemas.openxmlformats.org/officeDocument/2006/relationships" id="2147483651" r:id="R45f80175ea1b403d"/>
+    <p:sldLayoutId xmlns:r="http://schemas.openxmlformats.org/officeDocument/2006/relationships" id="2147483652" r:id="R14852b92e2b941d2"/>
+    <p:sldLayoutId xmlns:r="http://schemas.openxmlformats.org/officeDocument/2006/relationships" id="2147483653" r:id="Rd6f6c0d09407415a"/>
+    <p:sldLayoutId xmlns:r="http://schemas.openxmlformats.org/officeDocument/2006/relationships" id="2147483654" r:id="Rac4e9f0576844ed9"/>
+    <p:sldLayoutId xmlns:r="http://schemas.openxmlformats.org/officeDocument/2006/relationships" id="2147483655" r:id="R40afb033b7ad4df5"/>
+    <p:sldLayoutId xmlns:r="http://schemas.openxmlformats.org/officeDocument/2006/relationships" id="2147483656" r:id="R77962922b0c245e7"/>
+    <p:sldLayoutId xmlns:r="http://schemas.openxmlformats.org/officeDocument/2006/relationships" id="2147483657" r:id="R47b5d47932bf4c80"/>
+    <p:sldLayoutId xmlns:r="http://schemas.openxmlformats.org/officeDocument/2006/relationships" id="2147483658" r:id="Rc757b209734a403d"/>
+    <p:sldLayoutId xmlns:r="http://schemas.openxmlformats.org/officeDocument/2006/relationships" id="2147483659" r:id="R189320dba2044b90"/>
   </p:sldLayoutIdLst>
   <p:hf hdr="0" ftr="0" dt="0"/>
   <p:txStyles>
